--- a/tutor-time/question-the-headline/downloads/Question_the_Headline_Lesson_4.pptx
+++ b/tutor-time/question-the-headline/downloads/Question_the_Headline_Lesson_4.pptx
@@ -4790,7 +4790,7 @@
                 </a:solidFill>
                 <a:latin typeface="Karla"/>
               </a:rPr>
-              <a:t>The US took lead out of petrol from 1975 and banned it for cars in 1996. Lead paint and lead solder were also banned. Egan and others, 2021; US Environmental Protection Agency.</a:t>
+              <a:t>The US took lead out of petrol from 1975 and banned it for cars in 1996.</a:t>
             </a:r>
           </a:p>
         </p:txBody>
@@ -9886,7 +9886,7 @@
                 </a:solidFill>
                 <a:latin typeface="Libre Caslon Display"/>
               </a:rPr>
-              <a:t>1922</a:t>
+              <a:t>1923</a:t>
             </a:r>
           </a:p>
         </p:txBody>
@@ -17391,7 +17391,7 @@
                 </a:solidFill>
                 <a:latin typeface="Karla"/>
               </a:rPr>
-              <a:t>Tested on who, for how long, and by somebody with nothing to gain?</a:t>
+              <a:t>Tested on whom, for how long, and by somebody with nothing to gain?</a:t>
             </a:r>
           </a:p>
         </p:txBody>

--- a/tutor-time/question-the-headline/downloads/Question_the_Headline_Lesson_4.pptx
+++ b/tutor-time/question-the-headline/downloads/Question_the_Headline_Lesson_4.pptx
@@ -166,7 +166,7 @@
                         <a:solidFill>
                           <a:srgbClr val="262422"/>
                         </a:solidFill>
-                        <a:latin typeface="Karla"/>
+                        <a:latin typeface="Calibri"/>
                       </a:rPr>
                       <a:t>15.2</a:t>
                     </a:r>
@@ -193,7 +193,7 @@
                         <a:solidFill>
                           <a:srgbClr val="262422"/>
                         </a:solidFill>
-                        <a:latin typeface="Karla"/>
+                        <a:latin typeface="Calibri"/>
                       </a:rPr>
                       <a:t>2.2</a:t>
                     </a:r>
@@ -220,7 +220,7 @@
                         <a:solidFill>
                           <a:srgbClr val="262422"/>
                         </a:solidFill>
-                        <a:latin typeface="Karla"/>
+                        <a:latin typeface="Calibri"/>
                       </a:rPr>
                       <a:t>1.5</a:t>
                     </a:r>
@@ -247,7 +247,7 @@
                         <a:solidFill>
                           <a:srgbClr val="262422"/>
                         </a:solidFill>
-                        <a:latin typeface="Karla"/>
+                        <a:latin typeface="Calibri"/>
                       </a:rPr>
                       <a:t>1.0</a:t>
                     </a:r>
@@ -274,7 +274,7 @@
                         <a:solidFill>
                           <a:srgbClr val="262422"/>
                         </a:solidFill>
-                        <a:latin typeface="Karla"/>
+                        <a:latin typeface="Calibri"/>
                       </a:rPr>
                       <a:t>0.7</a:t>
                     </a:r>
@@ -355,7 +355,7 @@
                   <a:solidFill>
                     <a:srgbClr val="262422"/>
                   </a:solidFill>
-                  <a:latin typeface="Karla"/>
+                  <a:latin typeface="Calibri"/>
                 </a:defRPr>
               </a:pPr>
             </a:p>
@@ -391,7 +391,7 @@
                     <a:solidFill>
                       <a:srgbClr val="56524B"/>
                     </a:solidFill>
-                    <a:latin typeface="Karla"/>
+                    <a:latin typeface="Calibri"/>
                   </a:rPr>
                   <a:t>Survey years</a:t>
                 </a:r>
@@ -420,7 +420,7 @@
                 <a:solidFill>
                   <a:srgbClr val="262422"/>
                 </a:solidFill>
-                <a:latin typeface="Karla"/>
+                <a:latin typeface="Calibri"/>
               </a:defRPr>
             </a:pPr>
           </a:p>
@@ -458,7 +458,7 @@
           <a:solidFill>
             <a:srgbClr val="262422"/>
           </a:solidFill>
-          <a:latin typeface="Karla"/>
+          <a:latin typeface="Calibri"/>
         </a:defRPr>
       </a:pPr>
       <a:endParaRPr lang="en-US"/>
@@ -3531,7 +3531,7 @@
                 <a:solidFill>
                   <a:srgbClr val="34322F"/>
                 </a:solidFill>
-                <a:latin typeface="Karla"/>
+                <a:latin typeface="Calibri"/>
               </a:rPr>
               <a:t>TUTOR TIME  ·  QUESTION THE HEADLINE  ·  LESSON 4 OF 5</a:t>
             </a:r>
@@ -3614,11 +3614,11 @@
               </a:spcAft>
             </a:pPr>
             <a:r>
-              <a:rPr sz="3000" b="1" i="0">
+              <a:rPr sz="3000" b="0" i="0">
                 <a:solidFill>
                   <a:srgbClr val="262422"/>
                 </a:solidFill>
-                <a:latin typeface="Libre Caslon Display"/>
+                <a:latin typeface="Georgia"/>
               </a:rPr>
               <a:t>The Daily Claim</a:t>
             </a:r>
@@ -3705,7 +3705,7 @@
                 <a:solidFill>
                   <a:srgbClr val="56524B"/>
                 </a:solidFill>
-                <a:latin typeface="Karla"/>
+                <a:latin typeface="Calibri"/>
               </a:rPr>
               <a:t>WASHINGTON, 1926</a:t>
             </a:r>
@@ -3748,7 +3748,7 @@
                 <a:solidFill>
                   <a:srgbClr val="56524B"/>
                 </a:solidFill>
-                <a:latin typeface="Karla"/>
+                <a:latin typeface="Calibri"/>
               </a:rPr>
               <a:t>VOLUME ONE</a:t>
             </a:r>
@@ -3791,7 +3791,7 @@
                 <a:solidFill>
                   <a:srgbClr val="56524B"/>
                 </a:solidFill>
-                <a:latin typeface="Karla"/>
+                <a:latin typeface="Calibri"/>
               </a:rPr>
               <a:t>TUTOR TIME</a:t>
             </a:r>
@@ -3874,11 +3874,11 @@
               </a:spcAft>
             </a:pPr>
             <a:r>
-              <a:rPr sz="4200" b="1" i="0">
+              <a:rPr sz="4200" b="0" i="0">
                 <a:solidFill>
                   <a:srgbClr val="262422"/>
                 </a:solidFill>
-                <a:latin typeface="Libre Caslon Display"/>
+                <a:latin typeface="Georgia"/>
               </a:rPr>
               <a:t>No Real Evidence</a:t>
             </a:r>
@@ -3965,7 +3965,7 @@
                 <a:solidFill>
                   <a:srgbClr val="56524B"/>
                 </a:solidFill>
-                <a:latin typeface="Karla"/>
+                <a:latin typeface="Calibri"/>
               </a:rPr>
               <a:t>A claim that was printed as true, and four pieces of evidence to test it.</a:t>
             </a:r>
@@ -4020,7 +4020,7 @@
                 <a:solidFill>
                   <a:srgbClr val="FFFDF7"/>
                 </a:solidFill>
-                <a:latin typeface="Karla"/>
+                <a:latin typeface="Calibri"/>
               </a:rPr>
               <a:t>VOLUME ONE</a:t>
             </a:r>
@@ -4088,7 +4088,7 @@
                 <a:solidFill>
                   <a:srgbClr val="8C877D"/>
                 </a:solidFill>
-                <a:latin typeface="Karla"/>
+                <a:latin typeface="Calibri"/>
               </a:rPr>
               <a:t>The Pastoral Guide</a:t>
             </a:r>
@@ -4131,7 +4131,7 @@
                 <a:solidFill>
                   <a:srgbClr val="8C877D"/>
                 </a:solidFill>
-                <a:latin typeface="Karla"/>
+                <a:latin typeface="Calibri"/>
               </a:rPr>
               <a:t>1 / 19</a:t>
             </a:r>
@@ -4236,7 +4236,7 @@
                 <a:solidFill>
                   <a:srgbClr val="34322F"/>
                 </a:solidFill>
-                <a:latin typeface="Karla"/>
+                <a:latin typeface="Calibri"/>
               </a:rPr>
               <a:t>QUESTION THE HEADLINE  ·  LESSON 4 OF 5</a:t>
             </a:r>
@@ -4291,7 +4291,7 @@
                 <a:solidFill>
                   <a:srgbClr val="FFFDF7"/>
                 </a:solidFill>
-                <a:latin typeface="Karla"/>
+                <a:latin typeface="Calibri"/>
               </a:rPr>
               <a:t>ROUND 3 OF 4</a:t>
             </a:r>
@@ -4378,7 +4378,7 @@
                 <a:solidFill>
                   <a:srgbClr val="FFFDF7"/>
                 </a:solidFill>
-                <a:latin typeface="Karla"/>
+                <a:latin typeface="Calibri"/>
               </a:rPr>
               <a:t>EVIDENCE C</a:t>
             </a:r>
@@ -4505,11 +4505,11 @@
               </a:spcAft>
             </a:pPr>
             <a:r>
-              <a:rPr sz="1800" b="1" i="0">
+              <a:rPr sz="1800" b="0" i="0">
                 <a:solidFill>
                   <a:srgbClr val="262422"/>
                 </a:solidFill>
-                <a:latin typeface="Libre Caslon Display"/>
+                <a:latin typeface="Georgia"/>
               </a:rPr>
               <a:t>The numbers</a:t>
             </a:r>
@@ -4658,7 +4658,7 @@
                 <a:solidFill>
                   <a:srgbClr val="56524B"/>
                 </a:solidFill>
-                <a:latin typeface="Karla"/>
+                <a:latin typeface="Calibri"/>
               </a:rPr>
               <a:t>Micrograms of lead per decilitre of blood, children aged 1 to 5</a:t>
             </a:r>
@@ -4745,7 +4745,7 @@
                 <a:solidFill>
                   <a:srgbClr val="34322F"/>
                 </a:solidFill>
-                <a:latin typeface="Karla"/>
+                <a:latin typeface="Calibri"/>
               </a:rPr>
               <a:t>ABOUT THIS</a:t>
             </a:r>
@@ -4788,7 +4788,7 @@
                 <a:solidFill>
                   <a:srgbClr val="262422"/>
                 </a:solidFill>
-                <a:latin typeface="Karla"/>
+                <a:latin typeface="Calibri"/>
               </a:rPr>
               <a:t>The US took lead out of petrol from 1975 and banned it for cars in 1996.</a:t>
             </a:r>
@@ -4831,7 +4831,7 @@
                 <a:solidFill>
                   <a:srgbClr val="8C877D"/>
                 </a:solidFill>
-                <a:latin typeface="Karla"/>
+                <a:latin typeface="Calibri"/>
               </a:rPr>
               <a:t>Source: Egan and others, 2021; US EPA</a:t>
             </a:r>
@@ -4874,7 +4874,7 @@
                 <a:solidFill>
                   <a:srgbClr val="34322F"/>
                 </a:solidFill>
-                <a:latin typeface="Karla"/>
+                <a:latin typeface="Calibri"/>
               </a:rPr>
               <a:t>Read it as a group. Fill in the card C row on your evidence sheet, then move on the line.</a:t>
             </a:r>
@@ -4942,7 +4942,7 @@
                 <a:solidFill>
                   <a:srgbClr val="8C877D"/>
                 </a:solidFill>
-                <a:latin typeface="Karla"/>
+                <a:latin typeface="Calibri"/>
               </a:rPr>
               <a:t>The Pastoral Guide</a:t>
             </a:r>
@@ -4985,7 +4985,7 @@
                 <a:solidFill>
                   <a:srgbClr val="8C877D"/>
                 </a:solidFill>
-                <a:latin typeface="Karla"/>
+                <a:latin typeface="Calibri"/>
               </a:rPr>
               <a:t>10 / 19</a:t>
             </a:r>
@@ -5090,7 +5090,7 @@
                 <a:solidFill>
                   <a:srgbClr val="34322F"/>
                 </a:solidFill>
-                <a:latin typeface="Karla"/>
+                <a:latin typeface="Calibri"/>
               </a:rPr>
               <a:t>QUESTION THE HEADLINE  ·  LESSON 4 OF 5</a:t>
             </a:r>
@@ -5099,19 +5099,147 @@
       </p:sp>
       <p:sp>
         <p:nvSpPr>
-          <p:cNvPr id="4" name="Rounded Rectangle 3"/>
+          <p:cNvPr id="5" name="TextBox 4"/>
+          <p:cNvSpPr txBox="1"/>
+          <p:nvPr/>
+        </p:nvSpPr>
+        <p:spPr>
+          <a:xfrm>
+            <a:off x="685800" y="566928"/>
+            <a:ext cx="7772400" cy="434848"/>
+          </a:xfrm>
+          <a:prstGeom prst="rect">
+            <a:avLst/>
+          </a:prstGeom>
+          <a:noFill/>
+          <a:effectLst/>
+        </p:spPr>
+        <p:txBody>
+          <a:bodyPr wrap="square" anchor="t" lIns="0" rIns="0" tIns="0" bIns="0">
+            <a:spAutoFit/>
+          </a:bodyPr>
+          <a:lstStyle/>
+          <a:p>
+            <a:pPr algn="l">
+              <a:lnSpc>
+                <a:spcPct val="105000"/>
+              </a:lnSpc>
+              <a:spcAft>
+                <a:spcPts val="0"/>
+              </a:spcAft>
+            </a:pPr>
+            <a:r>
+              <a:rPr sz="2800" b="0" i="0">
+                <a:solidFill>
+                  <a:srgbClr val="262422"/>
+                </a:solidFill>
+                <a:latin typeface="Georgia"/>
+              </a:rPr>
+              <a:t>What do the numbers say?</a:t>
+            </a:r>
+          </a:p>
+        </p:txBody>
+      </p:sp>
+      <p:sp>
+        <p:nvSpPr>
+          <p:cNvPr id="6" name="TextBox 5"/>
+          <p:cNvSpPr txBox="1"/>
+          <p:nvPr/>
+        </p:nvSpPr>
+        <p:spPr>
+          <a:xfrm>
+            <a:off x="685800" y="1133856"/>
+            <a:ext cx="7772400" cy="274320"/>
+          </a:xfrm>
+          <a:prstGeom prst="rect">
+            <a:avLst/>
+          </a:prstGeom>
+          <a:noFill/>
+          <a:effectLst/>
+        </p:spPr>
+        <p:txBody>
+          <a:bodyPr wrap="square" anchor="t" lIns="0" rIns="0" tIns="0" bIns="0">
+            <a:spAutoFit/>
+          </a:bodyPr>
+          <a:lstStyle/>
+          <a:p>
+            <a:pPr algn="l">
+              <a:lnSpc>
+                <a:spcPct val="125000"/>
+              </a:lnSpc>
+              <a:spcAft>
+                <a:spcPts val="0"/>
+              </a:spcAft>
+            </a:pPr>
+            <a:r>
+              <a:rPr sz="1250" b="0" i="0">
+                <a:solidFill>
+                  <a:srgbClr val="56524B"/>
+                </a:solidFill>
+                <a:latin typeface="Calibri"/>
+              </a:rPr>
+              <a:t>Work them out in your group. Write your working on your evidence sheet.</a:t>
+            </a:r>
+          </a:p>
+        </p:txBody>
+      </p:sp>
+      <p:sp>
+        <p:nvSpPr>
+          <p:cNvPr id="7" name="Rectangle 6"/>
           <p:cNvSpPr/>
           <p:nvPr/>
         </p:nvSpPr>
         <p:spPr>
           <a:xfrm>
-            <a:off x="6406362" y="246888"/>
-            <a:ext cx="2051837" cy="237744"/>
-          </a:xfrm>
-          <a:prstGeom prst="roundRect">
-            <a:avLst>
-              <a:gd name="adj" fmla="val 50000"/>
-            </a:avLst>
+            <a:off x="685800" y="1481328"/>
+            <a:ext cx="7772400" cy="699516"/>
+          </a:xfrm>
+          <a:prstGeom prst="rect">
+            <a:avLst/>
+          </a:prstGeom>
+          <a:solidFill>
+            <a:srgbClr val="FFFFFF"/>
+          </a:solidFill>
+          <a:ln>
+            <a:noFill/>
+          </a:ln>
+          <a:effectLst/>
+        </p:spPr>
+        <p:style>
+          <a:lnRef idx="1">
+            <a:schemeClr val="accent1"/>
+          </a:lnRef>
+          <a:fillRef idx="3">
+            <a:schemeClr val="accent1"/>
+          </a:fillRef>
+          <a:effectRef idx="0">
+            <a:schemeClr val="accent1"/>
+          </a:effectRef>
+          <a:fontRef idx="minor">
+            <a:schemeClr val="lt1"/>
+          </a:fontRef>
+        </p:style>
+        <p:txBody>
+          <a:bodyPr rtlCol="0" anchor="ctr"/>
+          <a:lstStyle/>
+          <a:p>
+            <a:pPr algn="ctr"/>
+          </a:p>
+        </p:txBody>
+      </p:sp>
+      <p:sp>
+        <p:nvSpPr>
+          <p:cNvPr id="8" name="Oval 7"/>
+          <p:cNvSpPr/>
+          <p:nvPr/>
+        </p:nvSpPr>
+        <p:spPr>
+          <a:xfrm>
+            <a:off x="868680" y="1563624"/>
+            <a:ext cx="329184" cy="329184"/>
+          </a:xfrm>
+          <a:prstGeom prst="ellipse">
+            <a:avLst/>
           </a:prstGeom>
           <a:solidFill>
             <a:srgbClr val="34322F"/>
@@ -5136,32 +5264,66 @@
           </a:fontRef>
         </p:style>
         <p:txBody>
-          <a:bodyPr rtlCol="0" anchor="ctr" wrap="none" lIns="0" rIns="0" tIns="0" bIns="0"/>
+          <a:bodyPr rtlCol="0" anchor="ctr"/>
           <a:lstStyle/>
           <a:p>
             <a:pPr algn="ctr"/>
-            <a:r>
-              <a:rPr sz="950" b="1" spc="90">
+          </a:p>
+        </p:txBody>
+      </p:sp>
+      <p:sp>
+        <p:nvSpPr>
+          <p:cNvPr id="9" name="TextBox 8"/>
+          <p:cNvSpPr txBox="1"/>
+          <p:nvPr/>
+        </p:nvSpPr>
+        <p:spPr>
+          <a:xfrm>
+            <a:off x="868680" y="1636776"/>
+            <a:ext cx="329184" cy="182880"/>
+          </a:xfrm>
+          <a:prstGeom prst="rect">
+            <a:avLst/>
+          </a:prstGeom>
+          <a:noFill/>
+          <a:effectLst/>
+        </p:spPr>
+        <p:txBody>
+          <a:bodyPr wrap="square" anchor="t" lIns="0" rIns="0" tIns="0" bIns="0">
+            <a:spAutoFit/>
+          </a:bodyPr>
+          <a:lstStyle/>
+          <a:p>
+            <a:pPr algn="ctr">
+              <a:lnSpc>
+                <a:spcPct val="125000"/>
+              </a:lnSpc>
+              <a:spcAft>
+                <a:spcPts val="0"/>
+              </a:spcAft>
+            </a:pPr>
+            <a:r>
+              <a:rPr sz="1050" b="1" i="0">
                 <a:solidFill>
                   <a:srgbClr val="FFFDF7"/>
                 </a:solidFill>
-                <a:latin typeface="Karla"/>
-              </a:rPr>
-              <a:t>CRUNCH THE NUMBERS</a:t>
-            </a:r>
-          </a:p>
-        </p:txBody>
-      </p:sp>
-      <p:sp>
-        <p:nvSpPr>
-          <p:cNvPr id="5" name="TextBox 4"/>
-          <p:cNvSpPr txBox="1"/>
-          <p:nvPr/>
-        </p:nvSpPr>
-        <p:spPr>
-          <a:xfrm>
-            <a:off x="685800" y="566928"/>
-            <a:ext cx="7772400" cy="434848"/>
+                <a:latin typeface="Calibri"/>
+              </a:rPr>
+              <a:t>1</a:t>
+            </a:r>
+          </a:p>
+        </p:txBody>
+      </p:sp>
+      <p:sp>
+        <p:nvSpPr>
+          <p:cNvPr id="10" name="TextBox 9"/>
+          <p:cNvSpPr txBox="1"/>
+          <p:nvPr/>
+        </p:nvSpPr>
+        <p:spPr>
+          <a:xfrm>
+            <a:off x="1371600" y="1591056"/>
+            <a:ext cx="6903720" cy="480060"/>
           </a:xfrm>
           <a:prstGeom prst="rect">
             <a:avLst/>
@@ -5177,77 +5339,34 @@
           <a:p>
             <a:pPr algn="l">
               <a:lnSpc>
-                <a:spcPct val="105000"/>
-              </a:lnSpc>
-              <a:spcAft>
-                <a:spcPts val="0"/>
-              </a:spcAft>
-            </a:pPr>
-            <a:r>
-              <a:rPr sz="2800" b="1" i="0">
+                <a:spcPct val="120000"/>
+              </a:lnSpc>
+              <a:spcAft>
+                <a:spcPts val="0"/>
+              </a:spcAft>
+            </a:pPr>
+            <a:r>
+              <a:rPr sz="1500" b="1" i="0">
                 <a:solidFill>
                   <a:srgbClr val="262422"/>
                 </a:solidFill>
-                <a:latin typeface="Libre Caslon Display"/>
-              </a:rPr>
-              <a:t>What do the numbers say?</a:t>
-            </a:r>
-          </a:p>
-        </p:txBody>
-      </p:sp>
-      <p:sp>
-        <p:nvSpPr>
-          <p:cNvPr id="6" name="TextBox 5"/>
-          <p:cNvSpPr txBox="1"/>
-          <p:nvPr/>
-        </p:nvSpPr>
-        <p:spPr>
-          <a:xfrm>
-            <a:off x="685800" y="1133856"/>
-            <a:ext cx="7772400" cy="274320"/>
-          </a:xfrm>
-          <a:prstGeom prst="rect">
-            <a:avLst/>
-          </a:prstGeom>
-          <a:noFill/>
-          <a:effectLst/>
-        </p:spPr>
-        <p:txBody>
-          <a:bodyPr wrap="square" anchor="t" lIns="0" rIns="0" tIns="0" bIns="0">
-            <a:spAutoFit/>
-          </a:bodyPr>
-          <a:lstStyle/>
-          <a:p>
-            <a:pPr algn="l">
-              <a:lnSpc>
-                <a:spcPct val="125000"/>
-              </a:lnSpc>
-              <a:spcAft>
-                <a:spcPts val="0"/>
-              </a:spcAft>
-            </a:pPr>
-            <a:r>
-              <a:rPr sz="1250" b="0" i="0">
-                <a:solidFill>
-                  <a:srgbClr val="56524B"/>
-                </a:solidFill>
-                <a:latin typeface="Karla"/>
-              </a:rPr>
-              <a:t>Work them out in your group. Write your working on your evidence sheet.</a:t>
-            </a:r>
-          </a:p>
-        </p:txBody>
-      </p:sp>
-      <p:sp>
-        <p:nvSpPr>
-          <p:cNvPr id="7" name="Rectangle 6"/>
+                <a:latin typeface="Calibri"/>
+              </a:rPr>
+              <a:t>By roughly what percentage did the lead in young children’s blood fall from 1976–80 (15.2) to 2017–18 (0.7)?</a:t>
+            </a:r>
+          </a:p>
+        </p:txBody>
+      </p:sp>
+      <p:sp>
+        <p:nvSpPr>
+          <p:cNvPr id="11" name="Rectangle 10"/>
           <p:cNvSpPr/>
           <p:nvPr/>
         </p:nvSpPr>
         <p:spPr>
           <a:xfrm>
-            <a:off x="685800" y="1481328"/>
-            <a:ext cx="7772400" cy="699516"/>
+            <a:off x="685800" y="2345436"/>
+            <a:ext cx="7772400" cy="459485"/>
           </a:xfrm>
           <a:prstGeom prst="rect">
             <a:avLst/>
@@ -5284,13 +5403,13 @@
       </p:sp>
       <p:sp>
         <p:nvSpPr>
-          <p:cNvPr id="8" name="Oval 7"/>
+          <p:cNvPr id="12" name="Oval 11"/>
           <p:cNvSpPr/>
           <p:nvPr/>
         </p:nvSpPr>
         <p:spPr>
           <a:xfrm>
-            <a:off x="868680" y="1563624"/>
+            <a:off x="868680" y="2427732"/>
             <a:ext cx="329184" cy="329184"/>
           </a:xfrm>
           <a:prstGeom prst="ellipse">
@@ -5328,13 +5447,13 @@
       </p:sp>
       <p:sp>
         <p:nvSpPr>
-          <p:cNvPr id="9" name="TextBox 8"/>
-          <p:cNvSpPr txBox="1"/>
-          <p:nvPr/>
-        </p:nvSpPr>
-        <p:spPr>
-          <a:xfrm>
-            <a:off x="868680" y="1636776"/>
+          <p:cNvPr id="13" name="TextBox 12"/>
+          <p:cNvSpPr txBox="1"/>
+          <p:nvPr/>
+        </p:nvSpPr>
+        <p:spPr>
+          <a:xfrm>
+            <a:off x="868680" y="2500884"/>
             <a:ext cx="329184" cy="182880"/>
           </a:xfrm>
           <a:prstGeom prst="rect">
@@ -5362,23 +5481,23 @@
                 <a:solidFill>
                   <a:srgbClr val="FFFDF7"/>
                 </a:solidFill>
-                <a:latin typeface="Karla"/>
-              </a:rPr>
-              <a:t>1</a:t>
-            </a:r>
-          </a:p>
-        </p:txBody>
-      </p:sp>
-      <p:sp>
-        <p:nvSpPr>
-          <p:cNvPr id="10" name="TextBox 9"/>
-          <p:cNvSpPr txBox="1"/>
-          <p:nvPr/>
-        </p:nvSpPr>
-        <p:spPr>
-          <a:xfrm>
-            <a:off x="1371600" y="1591056"/>
-            <a:ext cx="6903720" cy="480060"/>
+                <a:latin typeface="Calibri"/>
+              </a:rPr>
+              <a:t>2</a:t>
+            </a:r>
+          </a:p>
+        </p:txBody>
+      </p:sp>
+      <p:sp>
+        <p:nvSpPr>
+          <p:cNvPr id="14" name="TextBox 13"/>
+          <p:cNvSpPr txBox="1"/>
+          <p:nvPr/>
+        </p:nvSpPr>
+        <p:spPr>
+          <a:xfrm>
+            <a:off x="1371600" y="2455164"/>
+            <a:ext cx="6903720" cy="240030"/>
           </a:xfrm>
           <a:prstGeom prst="rect">
             <a:avLst/>
@@ -5405,22 +5524,22 @@
                 <a:solidFill>
                   <a:srgbClr val="262422"/>
                 </a:solidFill>
-                <a:latin typeface="Karla"/>
-              </a:rPr>
-              <a:t>By roughly what percentage did the lead in young children’s blood fall from 1976–80 (15.2) to 2017–18 (0.7)?</a:t>
-            </a:r>
-          </a:p>
-        </p:txBody>
-      </p:sp>
-      <p:sp>
-        <p:nvSpPr>
-          <p:cNvPr id="11" name="Rectangle 10"/>
+                <a:latin typeface="Calibri"/>
+              </a:rPr>
+              <a:t>Between which two surveys on the graph was the biggest fall?</a:t>
+            </a:r>
+          </a:p>
+        </p:txBody>
+      </p:sp>
+      <p:sp>
+        <p:nvSpPr>
+          <p:cNvPr id="15" name="Rectangle 14"/>
           <p:cNvSpPr/>
           <p:nvPr/>
         </p:nvSpPr>
         <p:spPr>
           <a:xfrm>
-            <a:off x="685800" y="2345436"/>
+            <a:off x="685800" y="2969514"/>
             <a:ext cx="7772400" cy="459485"/>
           </a:xfrm>
           <a:prstGeom prst="rect">
@@ -5458,13 +5577,13 @@
       </p:sp>
       <p:sp>
         <p:nvSpPr>
-          <p:cNvPr id="12" name="Oval 11"/>
+          <p:cNvPr id="16" name="Oval 15"/>
           <p:cNvSpPr/>
           <p:nvPr/>
         </p:nvSpPr>
         <p:spPr>
           <a:xfrm>
-            <a:off x="868680" y="2427732"/>
+            <a:off x="868680" y="3051810"/>
             <a:ext cx="329184" cy="329184"/>
           </a:xfrm>
           <a:prstGeom prst="ellipse">
@@ -5502,180 +5621,6 @@
       </p:sp>
       <p:sp>
         <p:nvSpPr>
-          <p:cNvPr id="13" name="TextBox 12"/>
-          <p:cNvSpPr txBox="1"/>
-          <p:nvPr/>
-        </p:nvSpPr>
-        <p:spPr>
-          <a:xfrm>
-            <a:off x="868680" y="2500884"/>
-            <a:ext cx="329184" cy="182880"/>
-          </a:xfrm>
-          <a:prstGeom prst="rect">
-            <a:avLst/>
-          </a:prstGeom>
-          <a:noFill/>
-          <a:effectLst/>
-        </p:spPr>
-        <p:txBody>
-          <a:bodyPr wrap="square" anchor="t" lIns="0" rIns="0" tIns="0" bIns="0">
-            <a:spAutoFit/>
-          </a:bodyPr>
-          <a:lstStyle/>
-          <a:p>
-            <a:pPr algn="ctr">
-              <a:lnSpc>
-                <a:spcPct val="125000"/>
-              </a:lnSpc>
-              <a:spcAft>
-                <a:spcPts val="0"/>
-              </a:spcAft>
-            </a:pPr>
-            <a:r>
-              <a:rPr sz="1050" b="1" i="0">
-                <a:solidFill>
-                  <a:srgbClr val="FFFDF7"/>
-                </a:solidFill>
-                <a:latin typeface="Karla"/>
-              </a:rPr>
-              <a:t>2</a:t>
-            </a:r>
-          </a:p>
-        </p:txBody>
-      </p:sp>
-      <p:sp>
-        <p:nvSpPr>
-          <p:cNvPr id="14" name="TextBox 13"/>
-          <p:cNvSpPr txBox="1"/>
-          <p:nvPr/>
-        </p:nvSpPr>
-        <p:spPr>
-          <a:xfrm>
-            <a:off x="1371600" y="2455164"/>
-            <a:ext cx="6903720" cy="240030"/>
-          </a:xfrm>
-          <a:prstGeom prst="rect">
-            <a:avLst/>
-          </a:prstGeom>
-          <a:noFill/>
-          <a:effectLst/>
-        </p:spPr>
-        <p:txBody>
-          <a:bodyPr wrap="square" anchor="t" lIns="0" rIns="0" tIns="0" bIns="0">
-            <a:spAutoFit/>
-          </a:bodyPr>
-          <a:lstStyle/>
-          <a:p>
-            <a:pPr algn="l">
-              <a:lnSpc>
-                <a:spcPct val="120000"/>
-              </a:lnSpc>
-              <a:spcAft>
-                <a:spcPts val="0"/>
-              </a:spcAft>
-            </a:pPr>
-            <a:r>
-              <a:rPr sz="1500" b="1" i="0">
-                <a:solidFill>
-                  <a:srgbClr val="262422"/>
-                </a:solidFill>
-                <a:latin typeface="Karla"/>
-              </a:rPr>
-              <a:t>Between which two surveys on the graph was the biggest fall?</a:t>
-            </a:r>
-          </a:p>
-        </p:txBody>
-      </p:sp>
-      <p:sp>
-        <p:nvSpPr>
-          <p:cNvPr id="15" name="Rectangle 14"/>
-          <p:cNvSpPr/>
-          <p:nvPr/>
-        </p:nvSpPr>
-        <p:spPr>
-          <a:xfrm>
-            <a:off x="685800" y="2969514"/>
-            <a:ext cx="7772400" cy="459485"/>
-          </a:xfrm>
-          <a:prstGeom prst="rect">
-            <a:avLst/>
-          </a:prstGeom>
-          <a:solidFill>
-            <a:srgbClr val="FFFFFF"/>
-          </a:solidFill>
-          <a:ln>
-            <a:noFill/>
-          </a:ln>
-          <a:effectLst/>
-        </p:spPr>
-        <p:style>
-          <a:lnRef idx="1">
-            <a:schemeClr val="accent1"/>
-          </a:lnRef>
-          <a:fillRef idx="3">
-            <a:schemeClr val="accent1"/>
-          </a:fillRef>
-          <a:effectRef idx="0">
-            <a:schemeClr val="accent1"/>
-          </a:effectRef>
-          <a:fontRef idx="minor">
-            <a:schemeClr val="lt1"/>
-          </a:fontRef>
-        </p:style>
-        <p:txBody>
-          <a:bodyPr rtlCol="0" anchor="ctr"/>
-          <a:lstStyle/>
-          <a:p>
-            <a:pPr algn="ctr"/>
-          </a:p>
-        </p:txBody>
-      </p:sp>
-      <p:sp>
-        <p:nvSpPr>
-          <p:cNvPr id="16" name="Oval 15"/>
-          <p:cNvSpPr/>
-          <p:nvPr/>
-        </p:nvSpPr>
-        <p:spPr>
-          <a:xfrm>
-            <a:off x="868680" y="3051810"/>
-            <a:ext cx="329184" cy="329184"/>
-          </a:xfrm>
-          <a:prstGeom prst="ellipse">
-            <a:avLst/>
-          </a:prstGeom>
-          <a:solidFill>
-            <a:srgbClr val="34322F"/>
-          </a:solidFill>
-          <a:ln>
-            <a:noFill/>
-          </a:ln>
-          <a:effectLst/>
-        </p:spPr>
-        <p:style>
-          <a:lnRef idx="1">
-            <a:schemeClr val="accent1"/>
-          </a:lnRef>
-          <a:fillRef idx="3">
-            <a:schemeClr val="accent1"/>
-          </a:fillRef>
-          <a:effectRef idx="0">
-            <a:schemeClr val="accent1"/>
-          </a:effectRef>
-          <a:fontRef idx="minor">
-            <a:schemeClr val="lt1"/>
-          </a:fontRef>
-        </p:style>
-        <p:txBody>
-          <a:bodyPr rtlCol="0" anchor="ctr"/>
-          <a:lstStyle/>
-          <a:p>
-            <a:pPr algn="ctr"/>
-          </a:p>
-        </p:txBody>
-      </p:sp>
-      <p:sp>
-        <p:nvSpPr>
           <p:cNvPr id="17" name="TextBox 16"/>
           <p:cNvSpPr txBox="1"/>
           <p:nvPr/>
@@ -5710,7 +5655,7 @@
                 <a:solidFill>
                   <a:srgbClr val="FFFDF7"/>
                 </a:solidFill>
-                <a:latin typeface="Karla"/>
+                <a:latin typeface="Calibri"/>
               </a:rPr>
               <a:t>3</a:t>
             </a:r>
@@ -5753,7 +5698,7 @@
                 <a:solidFill>
                   <a:srgbClr val="262422"/>
                 </a:solidFill>
-                <a:latin typeface="Karla"/>
+                <a:latin typeface="Calibri"/>
               </a:rPr>
               <a:t>Name one other change that could explain some of the fall.</a:t>
             </a:r>
@@ -5821,7 +5766,7 @@
                 <a:solidFill>
                   <a:srgbClr val="8C877D"/>
                 </a:solidFill>
-                <a:latin typeface="Karla"/>
+                <a:latin typeface="Calibri"/>
               </a:rPr>
               <a:t>The Pastoral Guide</a:t>
             </a:r>
@@ -5864,7 +5809,7 @@
                 <a:solidFill>
                   <a:srgbClr val="8C877D"/>
                 </a:solidFill>
-                <a:latin typeface="Karla"/>
+                <a:latin typeface="Calibri"/>
               </a:rPr>
               <a:t>11 / 19</a:t>
             </a:r>
@@ -5969,7 +5914,7 @@
                 <a:solidFill>
                   <a:srgbClr val="34322F"/>
                 </a:solidFill>
-                <a:latin typeface="Karla"/>
+                <a:latin typeface="Calibri"/>
               </a:rPr>
               <a:t>QUESTION THE HEADLINE  ·  LESSON 4 OF 5</a:t>
             </a:r>
@@ -6024,7 +5969,7 @@
                 <a:solidFill>
                   <a:srgbClr val="FFFDF7"/>
                 </a:solidFill>
-                <a:latin typeface="Karla"/>
+                <a:latin typeface="Calibri"/>
               </a:rPr>
               <a:t>THE ANSWERS</a:t>
             </a:r>
@@ -6063,11 +6008,11 @@
               </a:spcAft>
             </a:pPr>
             <a:r>
-              <a:rPr sz="2800" b="1" i="0">
+              <a:rPr sz="2800" b="0" i="0">
                 <a:solidFill>
                   <a:srgbClr val="262422"/>
                 </a:solidFill>
-                <a:latin typeface="Libre Caslon Display"/>
+                <a:latin typeface="Georgia"/>
               </a:rPr>
               <a:t>Check your working</a:t>
             </a:r>
@@ -6110,7 +6055,7 @@
                 <a:solidFill>
                   <a:srgbClr val="56524B"/>
                 </a:solidFill>
-                <a:latin typeface="Karla"/>
+                <a:latin typeface="Calibri"/>
               </a:rPr>
               <a:t>Mark your own. A different method that gets the same answer is fine.</a:t>
             </a:r>
@@ -6241,7 +6186,7 @@
                 <a:solidFill>
                   <a:srgbClr val="FFFDF7"/>
                 </a:solidFill>
-                <a:latin typeface="Karla"/>
+                <a:latin typeface="Calibri"/>
               </a:rPr>
               <a:t>1</a:t>
             </a:r>
@@ -6284,7 +6229,7 @@
                 <a:solidFill>
                   <a:srgbClr val="262422"/>
                 </a:solidFill>
-                <a:latin typeface="Karla"/>
+                <a:latin typeface="Calibri"/>
               </a:rPr>
               <a:t>By roughly what percentage did the lead in young children’s blood fall from 1976–80 (15.2) to 2017–18 (0.7)?</a:t>
             </a:r>
@@ -6327,7 +6272,7 @@
                 <a:solidFill>
                   <a:srgbClr val="34322F"/>
                 </a:solidFill>
-                <a:latin typeface="Karla"/>
+                <a:latin typeface="Calibri"/>
               </a:rPr>
               <a:t>About 95 per cent ((15.2 − 0.7) ÷ 15.2 = 0.954).</a:t>
             </a:r>
@@ -6458,7 +6403,7 @@
                 <a:solidFill>
                   <a:srgbClr val="FFFDF7"/>
                 </a:solidFill>
-                <a:latin typeface="Karla"/>
+                <a:latin typeface="Calibri"/>
               </a:rPr>
               <a:t>2</a:t>
             </a:r>
@@ -6501,7 +6446,7 @@
                 <a:solidFill>
                   <a:srgbClr val="262422"/>
                 </a:solidFill>
-                <a:latin typeface="Karla"/>
+                <a:latin typeface="Calibri"/>
               </a:rPr>
               <a:t>Between which two surveys on the graph was the biggest fall?</a:t>
             </a:r>
@@ -6544,7 +6489,7 @@
                 <a:solidFill>
                   <a:srgbClr val="34322F"/>
                 </a:solidFill>
-                <a:latin typeface="Karla"/>
+                <a:latin typeface="Calibri"/>
               </a:rPr>
               <a:t>Between 1976–80 and 1999–2000, from 15.2 to 2.2, which is when lead came out of petrol.</a:t>
             </a:r>
@@ -6675,7 +6620,7 @@
                 <a:solidFill>
                   <a:srgbClr val="FFFDF7"/>
                 </a:solidFill>
-                <a:latin typeface="Karla"/>
+                <a:latin typeface="Calibri"/>
               </a:rPr>
               <a:t>3</a:t>
             </a:r>
@@ -6718,7 +6663,7 @@
                 <a:solidFill>
                   <a:srgbClr val="262422"/>
                 </a:solidFill>
-                <a:latin typeface="Karla"/>
+                <a:latin typeface="Calibri"/>
               </a:rPr>
               <a:t>Name one other change that could explain some of the fall.</a:t>
             </a:r>
@@ -6761,7 +6706,7 @@
                 <a:solidFill>
                   <a:srgbClr val="34322F"/>
                 </a:solidFill>
-                <a:latin typeface="Karla"/>
+                <a:latin typeface="Calibri"/>
               </a:rPr>
               <a:t>Lead paint and lead solder were banned in the same years.</a:t>
             </a:r>
@@ -6829,7 +6774,7 @@
                 <a:solidFill>
                   <a:srgbClr val="8C877D"/>
                 </a:solidFill>
-                <a:latin typeface="Karla"/>
+                <a:latin typeface="Calibri"/>
               </a:rPr>
               <a:t>The Pastoral Guide</a:t>
             </a:r>
@@ -6872,7 +6817,7 @@
                 <a:solidFill>
                   <a:srgbClr val="8C877D"/>
                 </a:solidFill>
-                <a:latin typeface="Karla"/>
+                <a:latin typeface="Calibri"/>
               </a:rPr>
               <a:t>12 / 19</a:t>
             </a:r>
@@ -6977,7 +6922,7 @@
                 <a:solidFill>
                   <a:srgbClr val="34322F"/>
                 </a:solidFill>
-                <a:latin typeface="Karla"/>
+                <a:latin typeface="Calibri"/>
               </a:rPr>
               <a:t>QUESTION THE HEADLINE  ·  LESSON 4 OF 5</a:t>
             </a:r>
@@ -7032,7 +6977,7 @@
                 <a:solidFill>
                   <a:srgbClr val="FFFDF7"/>
                 </a:solidFill>
-                <a:latin typeface="Karla"/>
+                <a:latin typeface="Calibri"/>
               </a:rPr>
               <a:t>ROUND 4 OF 4</a:t>
             </a:r>
@@ -7119,7 +7064,7 @@
                 <a:solidFill>
                   <a:srgbClr val="FFFDF7"/>
                 </a:solidFill>
-                <a:latin typeface="Karla"/>
+                <a:latin typeface="Calibri"/>
               </a:rPr>
               <a:t>EVIDENCE D</a:t>
             </a:r>
@@ -7246,11 +7191,11 @@
               </a:spcAft>
             </a:pPr>
             <a:r>
-              <a:rPr sz="2200" b="1" i="0">
+              <a:rPr sz="2200" b="0" i="0">
                 <a:solidFill>
                   <a:srgbClr val="262422"/>
                 </a:solidFill>
-                <a:latin typeface="Libre Caslon Display"/>
+                <a:latin typeface="Georgia"/>
               </a:rPr>
               <a:t>The scientist</a:t>
             </a:r>
@@ -7336,7 +7281,7 @@
                 <a:solidFill>
                   <a:srgbClr val="8C877D"/>
                 </a:solidFill>
-                <a:latin typeface="Karla"/>
+                <a:latin typeface="Calibri"/>
               </a:rPr>
               <a:t>Source: Wikipedia, Clair Cameron Patterson</a:t>
             </a:r>
@@ -7379,7 +7324,7 @@
                 <a:solidFill>
                   <a:srgbClr val="34322F"/>
                 </a:solidFill>
-                <a:latin typeface="Karla"/>
+                <a:latin typeface="Calibri"/>
               </a:rPr>
               <a:t>Read it as a group. Fill in the card D row on your evidence sheet, then move on the line.</a:t>
             </a:r>
@@ -7447,7 +7392,7 @@
                 <a:solidFill>
                   <a:srgbClr val="8C877D"/>
                 </a:solidFill>
-                <a:latin typeface="Karla"/>
+                <a:latin typeface="Calibri"/>
               </a:rPr>
               <a:t>The Pastoral Guide</a:t>
             </a:r>
@@ -7490,7 +7435,7 @@
                 <a:solidFill>
                   <a:srgbClr val="8C877D"/>
                 </a:solidFill>
-                <a:latin typeface="Karla"/>
+                <a:latin typeface="Calibri"/>
               </a:rPr>
               <a:t>13 / 19</a:t>
             </a:r>
@@ -7595,7 +7540,7 @@
                 <a:solidFill>
                   <a:srgbClr val="34322F"/>
                 </a:solidFill>
-                <a:latin typeface="Karla"/>
+                <a:latin typeface="Calibri"/>
               </a:rPr>
               <a:t>QUESTION THE HEADLINE  ·  LESSON 4 OF 5</a:t>
             </a:r>
@@ -7604,19 +7549,147 @@
       </p:sp>
       <p:sp>
         <p:nvSpPr>
-          <p:cNvPr id="4" name="Rounded Rectangle 3"/>
+          <p:cNvPr id="5" name="TextBox 4"/>
+          <p:cNvSpPr txBox="1"/>
+          <p:nvPr/>
+        </p:nvSpPr>
+        <p:spPr>
+          <a:xfrm>
+            <a:off x="685800" y="566928"/>
+            <a:ext cx="7772400" cy="434848"/>
+          </a:xfrm>
+          <a:prstGeom prst="rect">
+            <a:avLst/>
+          </a:prstGeom>
+          <a:noFill/>
+          <a:effectLst/>
+        </p:spPr>
+        <p:txBody>
+          <a:bodyPr wrap="square" anchor="t" lIns="0" rIns="0" tIns="0" bIns="0">
+            <a:spAutoFit/>
+          </a:bodyPr>
+          <a:lstStyle/>
+          <a:p>
+            <a:pPr algn="l">
+              <a:lnSpc>
+                <a:spcPct val="105000"/>
+              </a:lnSpc>
+              <a:spcAft>
+                <a:spcPts val="0"/>
+              </a:spcAft>
+            </a:pPr>
+            <a:r>
+              <a:rPr sz="2800" b="0" i="0">
+                <a:solidFill>
+                  <a:srgbClr val="262422"/>
+                </a:solidFill>
+                <a:latin typeface="Georgia"/>
+              </a:rPr>
+              <a:t>Write the real front page</a:t>
+            </a:r>
+          </a:p>
+        </p:txBody>
+      </p:sp>
+      <p:sp>
+        <p:nvSpPr>
+          <p:cNvPr id="6" name="TextBox 5"/>
+          <p:cNvSpPr txBox="1"/>
+          <p:nvPr/>
+        </p:nvSpPr>
+        <p:spPr>
+          <a:xfrm>
+            <a:off x="685800" y="1115568"/>
+            <a:ext cx="7772400" cy="274320"/>
+          </a:xfrm>
+          <a:prstGeom prst="rect">
+            <a:avLst/>
+          </a:prstGeom>
+          <a:noFill/>
+          <a:effectLst/>
+        </p:spPr>
+        <p:txBody>
+          <a:bodyPr wrap="square" anchor="t" lIns="0" rIns="0" tIns="0" bIns="0">
+            <a:spAutoFit/>
+          </a:bodyPr>
+          <a:lstStyle/>
+          <a:p>
+            <a:pPr algn="l">
+              <a:lnSpc>
+                <a:spcPct val="125000"/>
+              </a:lnSpc>
+              <a:spcAft>
+                <a:spcPts val="0"/>
+              </a:spcAft>
+            </a:pPr>
+            <a:r>
+              <a:rPr sz="1300" b="0" i="0">
+                <a:solidFill>
+                  <a:srgbClr val="56524B"/>
+                </a:solidFill>
+                <a:latin typeface="Calibri"/>
+              </a:rPr>
+              <a:t>On your front page sheet, on your own or with one partner.</a:t>
+            </a:r>
+          </a:p>
+        </p:txBody>
+      </p:sp>
+      <p:sp>
+        <p:nvSpPr>
+          <p:cNvPr id="7" name="Rectangle 6"/>
           <p:cNvSpPr/>
           <p:nvPr/>
         </p:nvSpPr>
         <p:spPr>
           <a:xfrm>
-            <a:off x="7280579" y="246888"/>
-            <a:ext cx="1177620" cy="237744"/>
-          </a:xfrm>
-          <a:prstGeom prst="roundRect">
-            <a:avLst>
-              <a:gd name="adj" fmla="val 50000"/>
-            </a:avLst>
+            <a:off x="685800" y="1499616"/>
+            <a:ext cx="7772400" cy="676656"/>
+          </a:xfrm>
+          <a:prstGeom prst="rect">
+            <a:avLst/>
+          </a:prstGeom>
+          <a:solidFill>
+            <a:srgbClr val="FFFDF7"/>
+          </a:solidFill>
+          <a:ln>
+            <a:noFill/>
+          </a:ln>
+          <a:effectLst/>
+        </p:spPr>
+        <p:style>
+          <a:lnRef idx="1">
+            <a:schemeClr val="accent1"/>
+          </a:lnRef>
+          <a:fillRef idx="3">
+            <a:schemeClr val="accent1"/>
+          </a:fillRef>
+          <a:effectRef idx="0">
+            <a:schemeClr val="accent1"/>
+          </a:effectRef>
+          <a:fontRef idx="minor">
+            <a:schemeClr val="lt1"/>
+          </a:fontRef>
+        </p:style>
+        <p:txBody>
+          <a:bodyPr rtlCol="0" anchor="ctr"/>
+          <a:lstStyle/>
+          <a:p>
+            <a:pPr algn="ctr"/>
+          </a:p>
+        </p:txBody>
+      </p:sp>
+      <p:sp>
+        <p:nvSpPr>
+          <p:cNvPr id="8" name="Oval 7"/>
+          <p:cNvSpPr/>
+          <p:nvPr/>
+        </p:nvSpPr>
+        <p:spPr>
+          <a:xfrm>
+            <a:off x="868680" y="1636775"/>
+            <a:ext cx="402336" cy="402336"/>
+          </a:xfrm>
+          <a:prstGeom prst="ellipse">
+            <a:avLst/>
           </a:prstGeom>
           <a:solidFill>
             <a:srgbClr val="34322F"/>
@@ -7641,32 +7714,66 @@
           </a:fontRef>
         </p:style>
         <p:txBody>
-          <a:bodyPr rtlCol="0" anchor="ctr" wrap="none" lIns="0" rIns="0" tIns="0" bIns="0"/>
+          <a:bodyPr rtlCol="0" anchor="ctr"/>
           <a:lstStyle/>
           <a:p>
             <a:pPr algn="ctr"/>
-            <a:r>
-              <a:rPr sz="950" b="1" spc="90">
+          </a:p>
+        </p:txBody>
+      </p:sp>
+      <p:sp>
+        <p:nvSpPr>
+          <p:cNvPr id="9" name="TextBox 8"/>
+          <p:cNvSpPr txBox="1"/>
+          <p:nvPr/>
+        </p:nvSpPr>
+        <p:spPr>
+          <a:xfrm>
+            <a:off x="868680" y="1732787"/>
+            <a:ext cx="402336" cy="219456"/>
+          </a:xfrm>
+          <a:prstGeom prst="rect">
+            <a:avLst/>
+          </a:prstGeom>
+          <a:noFill/>
+          <a:effectLst/>
+        </p:spPr>
+        <p:txBody>
+          <a:bodyPr wrap="square" anchor="t" lIns="0" rIns="0" tIns="0" bIns="0">
+            <a:spAutoFit/>
+          </a:bodyPr>
+          <a:lstStyle/>
+          <a:p>
+            <a:pPr algn="ctr">
+              <a:lnSpc>
+                <a:spcPct val="125000"/>
+              </a:lnSpc>
+              <a:spcAft>
+                <a:spcPts val="0"/>
+              </a:spcAft>
+            </a:pPr>
+            <a:r>
+              <a:rPr sz="1150" b="1" i="0">
                 <a:solidFill>
                   <a:srgbClr val="FFFDF7"/>
                 </a:solidFill>
-                <a:latin typeface="Karla"/>
-              </a:rPr>
-              <a:t>YOUR TURN</a:t>
-            </a:r>
-          </a:p>
-        </p:txBody>
-      </p:sp>
-      <p:sp>
-        <p:nvSpPr>
-          <p:cNvPr id="5" name="TextBox 4"/>
-          <p:cNvSpPr txBox="1"/>
-          <p:nvPr/>
-        </p:nvSpPr>
-        <p:spPr>
-          <a:xfrm>
-            <a:off x="685800" y="566928"/>
-            <a:ext cx="7772400" cy="434848"/>
+                <a:latin typeface="Calibri"/>
+              </a:rPr>
+              <a:t>1</a:t>
+            </a:r>
+          </a:p>
+        </p:txBody>
+      </p:sp>
+      <p:sp>
+        <p:nvSpPr>
+          <p:cNvPr id="10" name="TextBox 9"/>
+          <p:cNvSpPr txBox="1"/>
+          <p:nvPr/>
+        </p:nvSpPr>
+        <p:spPr>
+          <a:xfrm>
+            <a:off x="1417320" y="1600200"/>
+            <a:ext cx="6821424" cy="237744"/>
           </a:xfrm>
           <a:prstGeom prst="rect">
             <a:avLst/>
@@ -7682,34 +7789,34 @@
           <a:p>
             <a:pPr algn="l">
               <a:lnSpc>
-                <a:spcPct val="105000"/>
-              </a:lnSpc>
-              <a:spcAft>
-                <a:spcPts val="0"/>
-              </a:spcAft>
-            </a:pPr>
-            <a:r>
-              <a:rPr sz="2800" b="1" i="0">
-                <a:solidFill>
-                  <a:srgbClr val="262422"/>
-                </a:solidFill>
-                <a:latin typeface="Libre Caslon Display"/>
-              </a:rPr>
-              <a:t>Write the real front page</a:t>
-            </a:r>
-          </a:p>
-        </p:txBody>
-      </p:sp>
-      <p:sp>
-        <p:nvSpPr>
-          <p:cNvPr id="6" name="TextBox 5"/>
-          <p:cNvSpPr txBox="1"/>
-          <p:nvPr/>
-        </p:nvSpPr>
-        <p:spPr>
-          <a:xfrm>
-            <a:off x="685800" y="1115568"/>
-            <a:ext cx="7772400" cy="274320"/>
+                <a:spcPct val="125000"/>
+              </a:lnSpc>
+              <a:spcAft>
+                <a:spcPts val="0"/>
+              </a:spcAft>
+            </a:pPr>
+            <a:r>
+              <a:rPr sz="1300" b="0" i="0">
+                <a:solidFill>
+                  <a:srgbClr val="34322F"/>
+                </a:solidFill>
+                <a:latin typeface="Georgia"/>
+              </a:rPr>
+              <a:t>A headline that is true to the evidence</a:t>
+            </a:r>
+          </a:p>
+        </p:txBody>
+      </p:sp>
+      <p:sp>
+        <p:nvSpPr>
+          <p:cNvPr id="11" name="TextBox 10"/>
+          <p:cNvSpPr txBox="1"/>
+          <p:nvPr/>
+        </p:nvSpPr>
+        <p:spPr>
+          <a:xfrm>
+            <a:off x="1417320" y="1847088"/>
+            <a:ext cx="6821424" cy="256031"/>
           </a:xfrm>
           <a:prstGeom prst="rect">
             <a:avLst/>
@@ -7732,26 +7839,26 @@
               </a:spcAft>
             </a:pPr>
             <a:r>
-              <a:rPr sz="1300" b="0" i="0">
+              <a:rPr sz="1100" b="0" i="0">
                 <a:solidFill>
                   <a:srgbClr val="56524B"/>
                 </a:solidFill>
-                <a:latin typeface="Karla"/>
-              </a:rPr>
-              <a:t>On your front page sheet, on your own or with one partner.</a:t>
-            </a:r>
-          </a:p>
-        </p:txBody>
-      </p:sp>
-      <p:sp>
-        <p:nvSpPr>
-          <p:cNvPr id="7" name="Rectangle 6"/>
+                <a:latin typeface="Calibri"/>
+              </a:rPr>
+              <a:t>No bigger than the evidence. If you are not sure, the headline can say so.</a:t>
+            </a:r>
+          </a:p>
+        </p:txBody>
+      </p:sp>
+      <p:sp>
+        <p:nvSpPr>
+          <p:cNvPr id="12" name="Rectangle 11"/>
           <p:cNvSpPr/>
           <p:nvPr/>
         </p:nvSpPr>
         <p:spPr>
           <a:xfrm>
-            <a:off x="685800" y="1499616"/>
+            <a:off x="685800" y="2304288"/>
             <a:ext cx="7772400" cy="676656"/>
           </a:xfrm>
           <a:prstGeom prst="rect">
@@ -7789,13 +7896,13 @@
       </p:sp>
       <p:sp>
         <p:nvSpPr>
-          <p:cNvPr id="8" name="Oval 7"/>
+          <p:cNvPr id="13" name="Oval 12"/>
           <p:cNvSpPr/>
           <p:nvPr/>
         </p:nvSpPr>
         <p:spPr>
           <a:xfrm>
-            <a:off x="868680" y="1636775"/>
+            <a:off x="868680" y="2441448"/>
             <a:ext cx="402336" cy="402336"/>
           </a:xfrm>
           <a:prstGeom prst="ellipse">
@@ -7833,13 +7940,13 @@
       </p:sp>
       <p:sp>
         <p:nvSpPr>
-          <p:cNvPr id="9" name="TextBox 8"/>
-          <p:cNvSpPr txBox="1"/>
-          <p:nvPr/>
-        </p:nvSpPr>
-        <p:spPr>
-          <a:xfrm>
-            <a:off x="868680" y="1732787"/>
+          <p:cNvPr id="14" name="TextBox 13"/>
+          <p:cNvSpPr txBox="1"/>
+          <p:nvPr/>
+        </p:nvSpPr>
+        <p:spPr>
+          <a:xfrm>
+            <a:off x="868680" y="2537460"/>
             <a:ext cx="402336" cy="219456"/>
           </a:xfrm>
           <a:prstGeom prst="rect">
@@ -7867,22 +7974,22 @@
                 <a:solidFill>
                   <a:srgbClr val="FFFDF7"/>
                 </a:solidFill>
-                <a:latin typeface="Karla"/>
-              </a:rPr>
-              <a:t>1</a:t>
-            </a:r>
-          </a:p>
-        </p:txBody>
-      </p:sp>
-      <p:sp>
-        <p:nvSpPr>
-          <p:cNvPr id="10" name="TextBox 9"/>
-          <p:cNvSpPr txBox="1"/>
-          <p:nvPr/>
-        </p:nvSpPr>
-        <p:spPr>
-          <a:xfrm>
-            <a:off x="1417320" y="1600200"/>
+                <a:latin typeface="Calibri"/>
+              </a:rPr>
+              <a:t>2</a:t>
+            </a:r>
+          </a:p>
+        </p:txBody>
+      </p:sp>
+      <p:sp>
+        <p:nvSpPr>
+          <p:cNvPr id="15" name="TextBox 14"/>
+          <p:cNvSpPr txBox="1"/>
+          <p:nvPr/>
+        </p:nvSpPr>
+        <p:spPr>
+          <a:xfrm>
+            <a:off x="1417320" y="2404872"/>
             <a:ext cx="6821424" cy="237744"/>
           </a:xfrm>
           <a:prstGeom prst="rect">
@@ -7906,26 +8013,26 @@
               </a:spcAft>
             </a:pPr>
             <a:r>
-              <a:rPr sz="1300" b="1" i="0">
+              <a:rPr sz="1300" b="0" i="0">
                 <a:solidFill>
                   <a:srgbClr val="34322F"/>
                 </a:solidFill>
-                <a:latin typeface="Libre Caslon Display"/>
-              </a:rPr>
-              <a:t>A headline that is true to the evidence</a:t>
-            </a:r>
-          </a:p>
-        </p:txBody>
-      </p:sp>
-      <p:sp>
-        <p:nvSpPr>
-          <p:cNvPr id="11" name="TextBox 10"/>
-          <p:cNvSpPr txBox="1"/>
-          <p:nvPr/>
-        </p:nvSpPr>
-        <p:spPr>
-          <a:xfrm>
-            <a:off x="1417320" y="1847088"/>
+                <a:latin typeface="Georgia"/>
+              </a:rPr>
+              <a:t>One line under it that sums up the story</a:t>
+            </a:r>
+          </a:p>
+        </p:txBody>
+      </p:sp>
+      <p:sp>
+        <p:nvSpPr>
+          <p:cNvPr id="16" name="TextBox 15"/>
+          <p:cNvSpPr txBox="1"/>
+          <p:nvPr/>
+        </p:nvSpPr>
+        <p:spPr>
+          <a:xfrm>
+            <a:off x="1417320" y="2651760"/>
             <a:ext cx="6821424" cy="256031"/>
           </a:xfrm>
           <a:prstGeom prst="rect">
@@ -7953,22 +8060,22 @@
                 <a:solidFill>
                   <a:srgbClr val="56524B"/>
                 </a:solidFill>
-                <a:latin typeface="Karla"/>
-              </a:rPr>
-              <a:t>No bigger than the evidence. If you are not sure, the headline can say so.</a:t>
-            </a:r>
-          </a:p>
-        </p:txBody>
-      </p:sp>
-      <p:sp>
-        <p:nvSpPr>
-          <p:cNvPr id="12" name="Rectangle 11"/>
+                <a:latin typeface="Calibri"/>
+              </a:rPr>
+              <a:t>Who made the claim, and what they stood to gain.</a:t>
+            </a:r>
+          </a:p>
+        </p:txBody>
+      </p:sp>
+      <p:sp>
+        <p:nvSpPr>
+          <p:cNvPr id="17" name="Rectangle 16"/>
           <p:cNvSpPr/>
           <p:nvPr/>
         </p:nvSpPr>
         <p:spPr>
           <a:xfrm>
-            <a:off x="685800" y="2304288"/>
+            <a:off x="685800" y="3108960"/>
             <a:ext cx="7772400" cy="676656"/>
           </a:xfrm>
           <a:prstGeom prst="rect">
@@ -8006,13 +8113,13 @@
       </p:sp>
       <p:sp>
         <p:nvSpPr>
-          <p:cNvPr id="13" name="Oval 12"/>
+          <p:cNvPr id="18" name="Oval 17"/>
           <p:cNvSpPr/>
           <p:nvPr/>
         </p:nvSpPr>
         <p:spPr>
           <a:xfrm>
-            <a:off x="868680" y="2441448"/>
+            <a:off x="868680" y="3246120"/>
             <a:ext cx="402336" cy="402336"/>
           </a:xfrm>
           <a:prstGeom prst="ellipse">
@@ -8050,223 +8157,6 @@
       </p:sp>
       <p:sp>
         <p:nvSpPr>
-          <p:cNvPr id="14" name="TextBox 13"/>
-          <p:cNvSpPr txBox="1"/>
-          <p:nvPr/>
-        </p:nvSpPr>
-        <p:spPr>
-          <a:xfrm>
-            <a:off x="868680" y="2537460"/>
-            <a:ext cx="402336" cy="219456"/>
-          </a:xfrm>
-          <a:prstGeom prst="rect">
-            <a:avLst/>
-          </a:prstGeom>
-          <a:noFill/>
-          <a:effectLst/>
-        </p:spPr>
-        <p:txBody>
-          <a:bodyPr wrap="square" anchor="t" lIns="0" rIns="0" tIns="0" bIns="0">
-            <a:spAutoFit/>
-          </a:bodyPr>
-          <a:lstStyle/>
-          <a:p>
-            <a:pPr algn="ctr">
-              <a:lnSpc>
-                <a:spcPct val="125000"/>
-              </a:lnSpc>
-              <a:spcAft>
-                <a:spcPts val="0"/>
-              </a:spcAft>
-            </a:pPr>
-            <a:r>
-              <a:rPr sz="1150" b="1" i="0">
-                <a:solidFill>
-                  <a:srgbClr val="FFFDF7"/>
-                </a:solidFill>
-                <a:latin typeface="Karla"/>
-              </a:rPr>
-              <a:t>2</a:t>
-            </a:r>
-          </a:p>
-        </p:txBody>
-      </p:sp>
-      <p:sp>
-        <p:nvSpPr>
-          <p:cNvPr id="15" name="TextBox 14"/>
-          <p:cNvSpPr txBox="1"/>
-          <p:nvPr/>
-        </p:nvSpPr>
-        <p:spPr>
-          <a:xfrm>
-            <a:off x="1417320" y="2404872"/>
-            <a:ext cx="6821424" cy="237744"/>
-          </a:xfrm>
-          <a:prstGeom prst="rect">
-            <a:avLst/>
-          </a:prstGeom>
-          <a:noFill/>
-          <a:effectLst/>
-        </p:spPr>
-        <p:txBody>
-          <a:bodyPr wrap="square" anchor="t" lIns="0" rIns="0" tIns="0" bIns="0">
-            <a:spAutoFit/>
-          </a:bodyPr>
-          <a:lstStyle/>
-          <a:p>
-            <a:pPr algn="l">
-              <a:lnSpc>
-                <a:spcPct val="125000"/>
-              </a:lnSpc>
-              <a:spcAft>
-                <a:spcPts val="0"/>
-              </a:spcAft>
-            </a:pPr>
-            <a:r>
-              <a:rPr sz="1300" b="1" i="0">
-                <a:solidFill>
-                  <a:srgbClr val="34322F"/>
-                </a:solidFill>
-                <a:latin typeface="Libre Caslon Display"/>
-              </a:rPr>
-              <a:t>One line under it that sums up the story</a:t>
-            </a:r>
-          </a:p>
-        </p:txBody>
-      </p:sp>
-      <p:sp>
-        <p:nvSpPr>
-          <p:cNvPr id="16" name="TextBox 15"/>
-          <p:cNvSpPr txBox="1"/>
-          <p:nvPr/>
-        </p:nvSpPr>
-        <p:spPr>
-          <a:xfrm>
-            <a:off x="1417320" y="2651760"/>
-            <a:ext cx="6821424" cy="256031"/>
-          </a:xfrm>
-          <a:prstGeom prst="rect">
-            <a:avLst/>
-          </a:prstGeom>
-          <a:noFill/>
-          <a:effectLst/>
-        </p:spPr>
-        <p:txBody>
-          <a:bodyPr wrap="square" anchor="t" lIns="0" rIns="0" tIns="0" bIns="0">
-            <a:spAutoFit/>
-          </a:bodyPr>
-          <a:lstStyle/>
-          <a:p>
-            <a:pPr algn="l">
-              <a:lnSpc>
-                <a:spcPct val="125000"/>
-              </a:lnSpc>
-              <a:spcAft>
-                <a:spcPts val="0"/>
-              </a:spcAft>
-            </a:pPr>
-            <a:r>
-              <a:rPr sz="1100" b="0" i="0">
-                <a:solidFill>
-                  <a:srgbClr val="56524B"/>
-                </a:solidFill>
-                <a:latin typeface="Karla"/>
-              </a:rPr>
-              <a:t>Who made the claim, and what they stood to gain.</a:t>
-            </a:r>
-          </a:p>
-        </p:txBody>
-      </p:sp>
-      <p:sp>
-        <p:nvSpPr>
-          <p:cNvPr id="17" name="Rectangle 16"/>
-          <p:cNvSpPr/>
-          <p:nvPr/>
-        </p:nvSpPr>
-        <p:spPr>
-          <a:xfrm>
-            <a:off x="685800" y="3108960"/>
-            <a:ext cx="7772400" cy="676656"/>
-          </a:xfrm>
-          <a:prstGeom prst="rect">
-            <a:avLst/>
-          </a:prstGeom>
-          <a:solidFill>
-            <a:srgbClr val="FFFDF7"/>
-          </a:solidFill>
-          <a:ln>
-            <a:noFill/>
-          </a:ln>
-          <a:effectLst/>
-        </p:spPr>
-        <p:style>
-          <a:lnRef idx="1">
-            <a:schemeClr val="accent1"/>
-          </a:lnRef>
-          <a:fillRef idx="3">
-            <a:schemeClr val="accent1"/>
-          </a:fillRef>
-          <a:effectRef idx="0">
-            <a:schemeClr val="accent1"/>
-          </a:effectRef>
-          <a:fontRef idx="minor">
-            <a:schemeClr val="lt1"/>
-          </a:fontRef>
-        </p:style>
-        <p:txBody>
-          <a:bodyPr rtlCol="0" anchor="ctr"/>
-          <a:lstStyle/>
-          <a:p>
-            <a:pPr algn="ctr"/>
-          </a:p>
-        </p:txBody>
-      </p:sp>
-      <p:sp>
-        <p:nvSpPr>
-          <p:cNvPr id="18" name="Oval 17"/>
-          <p:cNvSpPr/>
-          <p:nvPr/>
-        </p:nvSpPr>
-        <p:spPr>
-          <a:xfrm>
-            <a:off x="868680" y="3246120"/>
-            <a:ext cx="402336" cy="402336"/>
-          </a:xfrm>
-          <a:prstGeom prst="ellipse">
-            <a:avLst/>
-          </a:prstGeom>
-          <a:solidFill>
-            <a:srgbClr val="34322F"/>
-          </a:solidFill>
-          <a:ln>
-            <a:noFill/>
-          </a:ln>
-          <a:effectLst/>
-        </p:spPr>
-        <p:style>
-          <a:lnRef idx="1">
-            <a:schemeClr val="accent1"/>
-          </a:lnRef>
-          <a:fillRef idx="3">
-            <a:schemeClr val="accent1"/>
-          </a:fillRef>
-          <a:effectRef idx="0">
-            <a:schemeClr val="accent1"/>
-          </a:effectRef>
-          <a:fontRef idx="minor">
-            <a:schemeClr val="lt1"/>
-          </a:fontRef>
-        </p:style>
-        <p:txBody>
-          <a:bodyPr rtlCol="0" anchor="ctr"/>
-          <a:lstStyle/>
-          <a:p>
-            <a:pPr algn="ctr"/>
-          </a:p>
-        </p:txBody>
-      </p:sp>
-      <p:sp>
-        <p:nvSpPr>
           <p:cNvPr id="19" name="TextBox 18"/>
           <p:cNvSpPr txBox="1"/>
           <p:nvPr/>
@@ -8301,7 +8191,7 @@
                 <a:solidFill>
                   <a:srgbClr val="FFFDF7"/>
                 </a:solidFill>
-                <a:latin typeface="Karla"/>
+                <a:latin typeface="Calibri"/>
               </a:rPr>
               <a:t>3</a:t>
             </a:r>
@@ -8340,11 +8230,11 @@
               </a:spcAft>
             </a:pPr>
             <a:r>
-              <a:rPr sz="1300" b="1" i="0">
+              <a:rPr sz="1300" b="0" i="0">
                 <a:solidFill>
                   <a:srgbClr val="34322F"/>
                 </a:solidFill>
-                <a:latin typeface="Libre Caslon Display"/>
+                <a:latin typeface="Georgia"/>
               </a:rPr>
               <a:t>The story, in four or five sentences</a:t>
             </a:r>
@@ -8387,7 +8277,7 @@
                 <a:solidFill>
                   <a:srgbClr val="56524B"/>
                 </a:solidFill>
-                <a:latin typeface="Karla"/>
+                <a:latin typeface="Calibri"/>
               </a:rPr>
               <a:t>Use at least two cards, name each one, and put in one number from your sums.</a:t>
             </a:r>
@@ -8430,7 +8320,7 @@
                 <a:solidFill>
                   <a:srgbClr val="34322F"/>
                 </a:solidFill>
-                <a:latin typeface="Karla"/>
+                <a:latin typeface="Calibri"/>
               </a:rPr>
               <a:t>Your evidence sheet has everything you need. Write it for somebody who has not seen the cards.</a:t>
             </a:r>
@@ -8498,7 +8388,7 @@
                 <a:solidFill>
                   <a:srgbClr val="8C877D"/>
                 </a:solidFill>
-                <a:latin typeface="Karla"/>
+                <a:latin typeface="Calibri"/>
               </a:rPr>
               <a:t>The Pastoral Guide</a:t>
             </a:r>
@@ -8541,7 +8431,7 @@
                 <a:solidFill>
                   <a:srgbClr val="8C877D"/>
                 </a:solidFill>
-                <a:latin typeface="Karla"/>
+                <a:latin typeface="Calibri"/>
               </a:rPr>
               <a:t>14 / 19</a:t>
             </a:r>
@@ -8646,7 +8536,7 @@
                 <a:solidFill>
                   <a:srgbClr val="34322F"/>
                 </a:solidFill>
-                <a:latin typeface="Karla"/>
+                <a:latin typeface="Calibri"/>
               </a:rPr>
               <a:t>QUESTION THE HEADLINE  ·  LESSON 4 OF 5</a:t>
             </a:r>
@@ -8655,19 +8545,147 @@
       </p:sp>
       <p:sp>
         <p:nvSpPr>
-          <p:cNvPr id="4" name="Rounded Rectangle 3"/>
+          <p:cNvPr id="5" name="TextBox 4"/>
+          <p:cNvSpPr txBox="1"/>
+          <p:nvPr/>
+        </p:nvSpPr>
+        <p:spPr>
+          <a:xfrm>
+            <a:off x="685800" y="566928"/>
+            <a:ext cx="7772400" cy="434848"/>
+          </a:xfrm>
+          <a:prstGeom prst="rect">
+            <a:avLst/>
+          </a:prstGeom>
+          <a:noFill/>
+          <a:effectLst/>
+        </p:spPr>
+        <p:txBody>
+          <a:bodyPr wrap="square" anchor="t" lIns="0" rIns="0" tIns="0" bIns="0">
+            <a:spAutoFit/>
+          </a:bodyPr>
+          <a:lstStyle/>
+          <a:p>
+            <a:pPr algn="l">
+              <a:lnSpc>
+                <a:spcPct val="105000"/>
+              </a:lnSpc>
+              <a:spcAft>
+                <a:spcPts val="0"/>
+              </a:spcAft>
+            </a:pPr>
+            <a:r>
+              <a:rPr sz="2800" b="0" i="0">
+                <a:solidFill>
+                  <a:srgbClr val="262422"/>
+                </a:solidFill>
+                <a:latin typeface="Georgia"/>
+              </a:rPr>
+              <a:t>Check somebody else’s page</a:t>
+            </a:r>
+          </a:p>
+        </p:txBody>
+      </p:sp>
+      <p:sp>
+        <p:nvSpPr>
+          <p:cNvPr id="6" name="TextBox 5"/>
+          <p:cNvSpPr txBox="1"/>
+          <p:nvPr/>
+        </p:nvSpPr>
+        <p:spPr>
+          <a:xfrm>
+            <a:off x="685800" y="1152144"/>
+            <a:ext cx="7772400" cy="274320"/>
+          </a:xfrm>
+          <a:prstGeom prst="rect">
+            <a:avLst/>
+          </a:prstGeom>
+          <a:noFill/>
+          <a:effectLst/>
+        </p:spPr>
+        <p:txBody>
+          <a:bodyPr wrap="square" anchor="t" lIns="0" rIns="0" tIns="0" bIns="0">
+            <a:spAutoFit/>
+          </a:bodyPr>
+          <a:lstStyle/>
+          <a:p>
+            <a:pPr algn="l">
+              <a:lnSpc>
+                <a:spcPct val="125000"/>
+              </a:lnSpc>
+              <a:spcAft>
+                <a:spcPts val="0"/>
+              </a:spcAft>
+            </a:pPr>
+            <a:r>
+              <a:rPr sz="1300" b="0" i="0">
+                <a:solidFill>
+                  <a:srgbClr val="56524B"/>
+                </a:solidFill>
+                <a:latin typeface="Calibri"/>
+              </a:rPr>
+              <a:t>Swap front pages with somebody from another group. Tick each box it passes.</a:t>
+            </a:r>
+          </a:p>
+        </p:txBody>
+      </p:sp>
+      <p:sp>
+        <p:nvSpPr>
+          <p:cNvPr id="7" name="Rectangle 6"/>
           <p:cNvSpPr/>
           <p:nvPr/>
         </p:nvSpPr>
         <p:spPr>
           <a:xfrm>
-            <a:off x="7714534" y="246888"/>
-            <a:ext cx="743665" cy="237744"/>
-          </a:xfrm>
-          <a:prstGeom prst="roundRect">
-            <a:avLst>
-              <a:gd name="adj" fmla="val 50000"/>
-            </a:avLst>
+            <a:off x="685800" y="1591056"/>
+            <a:ext cx="7772400" cy="676656"/>
+          </a:xfrm>
+          <a:prstGeom prst="rect">
+            <a:avLst/>
+          </a:prstGeom>
+          <a:solidFill>
+            <a:srgbClr val="FFFDF7"/>
+          </a:solidFill>
+          <a:ln>
+            <a:noFill/>
+          </a:ln>
+          <a:effectLst/>
+        </p:spPr>
+        <p:style>
+          <a:lnRef idx="1">
+            <a:schemeClr val="accent1"/>
+          </a:lnRef>
+          <a:fillRef idx="3">
+            <a:schemeClr val="accent1"/>
+          </a:fillRef>
+          <a:effectRef idx="0">
+            <a:schemeClr val="accent1"/>
+          </a:effectRef>
+          <a:fontRef idx="minor">
+            <a:schemeClr val="lt1"/>
+          </a:fontRef>
+        </p:style>
+        <p:txBody>
+          <a:bodyPr rtlCol="0" anchor="ctr"/>
+          <a:lstStyle/>
+          <a:p>
+            <a:pPr algn="ctr"/>
+          </a:p>
+        </p:txBody>
+      </p:sp>
+      <p:sp>
+        <p:nvSpPr>
+          <p:cNvPr id="8" name="Oval 7"/>
+          <p:cNvSpPr/>
+          <p:nvPr/>
+        </p:nvSpPr>
+        <p:spPr>
+          <a:xfrm>
+            <a:off x="868680" y="1728216"/>
+            <a:ext cx="402336" cy="402336"/>
+          </a:xfrm>
+          <a:prstGeom prst="ellipse">
+            <a:avLst/>
           </a:prstGeom>
           <a:solidFill>
             <a:srgbClr val="34322F"/>
@@ -8692,32 +8710,66 @@
           </a:fontRef>
         </p:style>
         <p:txBody>
-          <a:bodyPr rtlCol="0" anchor="ctr" wrap="none" lIns="0" rIns="0" tIns="0" bIns="0"/>
+          <a:bodyPr rtlCol="0" anchor="ctr"/>
           <a:lstStyle/>
           <a:p>
             <a:pPr algn="ctr"/>
-            <a:r>
-              <a:rPr sz="950" b="1" spc="90">
+          </a:p>
+        </p:txBody>
+      </p:sp>
+      <p:sp>
+        <p:nvSpPr>
+          <p:cNvPr id="9" name="TextBox 8"/>
+          <p:cNvSpPr txBox="1"/>
+          <p:nvPr/>
+        </p:nvSpPr>
+        <p:spPr>
+          <a:xfrm>
+            <a:off x="868680" y="1824228"/>
+            <a:ext cx="402336" cy="219456"/>
+          </a:xfrm>
+          <a:prstGeom prst="rect">
+            <a:avLst/>
+          </a:prstGeom>
+          <a:noFill/>
+          <a:effectLst/>
+        </p:spPr>
+        <p:txBody>
+          <a:bodyPr wrap="square" anchor="t" lIns="0" rIns="0" tIns="0" bIns="0">
+            <a:spAutoFit/>
+          </a:bodyPr>
+          <a:lstStyle/>
+          <a:p>
+            <a:pPr algn="ctr">
+              <a:lnSpc>
+                <a:spcPct val="125000"/>
+              </a:lnSpc>
+              <a:spcAft>
+                <a:spcPts val="0"/>
+              </a:spcAft>
+            </a:pPr>
+            <a:r>
+              <a:rPr sz="1150" b="1" i="0">
                 <a:solidFill>
                   <a:srgbClr val="FFFDF7"/>
                 </a:solidFill>
-                <a:latin typeface="Karla"/>
-              </a:rPr>
-              <a:t>MARK</a:t>
-            </a:r>
-          </a:p>
-        </p:txBody>
-      </p:sp>
-      <p:sp>
-        <p:nvSpPr>
-          <p:cNvPr id="5" name="TextBox 4"/>
-          <p:cNvSpPr txBox="1"/>
-          <p:nvPr/>
-        </p:nvSpPr>
-        <p:spPr>
-          <a:xfrm>
-            <a:off x="685800" y="566928"/>
-            <a:ext cx="7772400" cy="434848"/>
+                <a:latin typeface="Calibri"/>
+              </a:rPr>
+              <a:t>1</a:t>
+            </a:r>
+          </a:p>
+        </p:txBody>
+      </p:sp>
+      <p:sp>
+        <p:nvSpPr>
+          <p:cNvPr id="10" name="TextBox 9"/>
+          <p:cNvSpPr txBox="1"/>
+          <p:nvPr/>
+        </p:nvSpPr>
+        <p:spPr>
+          <a:xfrm>
+            <a:off x="1417320" y="1691640"/>
+            <a:ext cx="6821424" cy="237744"/>
           </a:xfrm>
           <a:prstGeom prst="rect">
             <a:avLst/>
@@ -8733,34 +8785,34 @@
           <a:p>
             <a:pPr algn="l">
               <a:lnSpc>
-                <a:spcPct val="105000"/>
-              </a:lnSpc>
-              <a:spcAft>
-                <a:spcPts val="0"/>
-              </a:spcAft>
-            </a:pPr>
-            <a:r>
-              <a:rPr sz="2800" b="1" i="0">
-                <a:solidFill>
-                  <a:srgbClr val="262422"/>
-                </a:solidFill>
-                <a:latin typeface="Libre Caslon Display"/>
-              </a:rPr>
-              <a:t>Check somebody else’s page</a:t>
-            </a:r>
-          </a:p>
-        </p:txBody>
-      </p:sp>
-      <p:sp>
-        <p:nvSpPr>
-          <p:cNvPr id="6" name="TextBox 5"/>
-          <p:cNvSpPr txBox="1"/>
-          <p:nvPr/>
-        </p:nvSpPr>
-        <p:spPr>
-          <a:xfrm>
-            <a:off x="685800" y="1152144"/>
-            <a:ext cx="7772400" cy="274320"/>
+                <a:spcPct val="125000"/>
+              </a:lnSpc>
+              <a:spcAft>
+                <a:spcPts val="0"/>
+              </a:spcAft>
+            </a:pPr>
+            <a:r>
+              <a:rPr sz="1300" b="0" i="0">
+                <a:solidFill>
+                  <a:srgbClr val="34322F"/>
+                </a:solidFill>
+                <a:latin typeface="Georgia"/>
+              </a:rPr>
+              <a:t>Is the headline true to the evidence?</a:t>
+            </a:r>
+          </a:p>
+        </p:txBody>
+      </p:sp>
+      <p:sp>
+        <p:nvSpPr>
+          <p:cNvPr id="11" name="TextBox 10"/>
+          <p:cNvSpPr txBox="1"/>
+          <p:nvPr/>
+        </p:nvSpPr>
+        <p:spPr>
+          <a:xfrm>
+            <a:off x="1417320" y="1938528"/>
+            <a:ext cx="6821424" cy="256031"/>
           </a:xfrm>
           <a:prstGeom prst="rect">
             <a:avLst/>
@@ -8783,26 +8835,26 @@
               </a:spcAft>
             </a:pPr>
             <a:r>
-              <a:rPr sz="1300" b="0" i="0">
+              <a:rPr sz="1100" b="0" i="0">
                 <a:solidFill>
                   <a:srgbClr val="56524B"/>
                 </a:solidFill>
-                <a:latin typeface="Karla"/>
-              </a:rPr>
-              <a:t>Swap front pages with somebody from another group. Tick each box it passes.</a:t>
-            </a:r>
-          </a:p>
-        </p:txBody>
-      </p:sp>
-      <p:sp>
-        <p:nvSpPr>
-          <p:cNvPr id="7" name="Rectangle 6"/>
+                <a:latin typeface="Calibri"/>
+              </a:rPr>
+              <a:t>Not bigger, not smaller, than what the cards show.</a:t>
+            </a:r>
+          </a:p>
+        </p:txBody>
+      </p:sp>
+      <p:sp>
+        <p:nvSpPr>
+          <p:cNvPr id="12" name="Rectangle 11"/>
           <p:cNvSpPr/>
           <p:nvPr/>
         </p:nvSpPr>
         <p:spPr>
           <a:xfrm>
-            <a:off x="685800" y="1591056"/>
+            <a:off x="685800" y="2414016"/>
             <a:ext cx="7772400" cy="676656"/>
           </a:xfrm>
           <a:prstGeom prst="rect">
@@ -8840,13 +8892,13 @@
       </p:sp>
       <p:sp>
         <p:nvSpPr>
-          <p:cNvPr id="8" name="Oval 7"/>
+          <p:cNvPr id="13" name="Oval 12"/>
           <p:cNvSpPr/>
           <p:nvPr/>
         </p:nvSpPr>
         <p:spPr>
           <a:xfrm>
-            <a:off x="868680" y="1728216"/>
+            <a:off x="868680" y="2551176"/>
             <a:ext cx="402336" cy="402336"/>
           </a:xfrm>
           <a:prstGeom prst="ellipse">
@@ -8884,13 +8936,13 @@
       </p:sp>
       <p:sp>
         <p:nvSpPr>
-          <p:cNvPr id="9" name="TextBox 8"/>
-          <p:cNvSpPr txBox="1"/>
-          <p:nvPr/>
-        </p:nvSpPr>
-        <p:spPr>
-          <a:xfrm>
-            <a:off x="868680" y="1824228"/>
+          <p:cNvPr id="14" name="TextBox 13"/>
+          <p:cNvSpPr txBox="1"/>
+          <p:nvPr/>
+        </p:nvSpPr>
+        <p:spPr>
+          <a:xfrm>
+            <a:off x="868680" y="2647188"/>
             <a:ext cx="402336" cy="219456"/>
           </a:xfrm>
           <a:prstGeom prst="rect">
@@ -8918,22 +8970,22 @@
                 <a:solidFill>
                   <a:srgbClr val="FFFDF7"/>
                 </a:solidFill>
-                <a:latin typeface="Karla"/>
-              </a:rPr>
-              <a:t>1</a:t>
-            </a:r>
-          </a:p>
-        </p:txBody>
-      </p:sp>
-      <p:sp>
-        <p:nvSpPr>
-          <p:cNvPr id="10" name="TextBox 9"/>
-          <p:cNvSpPr txBox="1"/>
-          <p:nvPr/>
-        </p:nvSpPr>
-        <p:spPr>
-          <a:xfrm>
-            <a:off x="1417320" y="1691640"/>
+                <a:latin typeface="Calibri"/>
+              </a:rPr>
+              <a:t>2</a:t>
+            </a:r>
+          </a:p>
+        </p:txBody>
+      </p:sp>
+      <p:sp>
+        <p:nvSpPr>
+          <p:cNvPr id="15" name="TextBox 14"/>
+          <p:cNvSpPr txBox="1"/>
+          <p:nvPr/>
+        </p:nvSpPr>
+        <p:spPr>
+          <a:xfrm>
+            <a:off x="1417320" y="2514600"/>
             <a:ext cx="6821424" cy="237744"/>
           </a:xfrm>
           <a:prstGeom prst="rect">
@@ -8957,26 +9009,26 @@
               </a:spcAft>
             </a:pPr>
             <a:r>
-              <a:rPr sz="1300" b="1" i="0">
+              <a:rPr sz="1300" b="0" i="0">
                 <a:solidFill>
                   <a:srgbClr val="34322F"/>
                 </a:solidFill>
-                <a:latin typeface="Libre Caslon Display"/>
-              </a:rPr>
-              <a:t>Is the headline true to the evidence?</a:t>
-            </a:r>
-          </a:p>
-        </p:txBody>
-      </p:sp>
-      <p:sp>
-        <p:nvSpPr>
-          <p:cNvPr id="11" name="TextBox 10"/>
-          <p:cNvSpPr txBox="1"/>
-          <p:nvPr/>
-        </p:nvSpPr>
-        <p:spPr>
-          <a:xfrm>
-            <a:off x="1417320" y="1938528"/>
+                <a:latin typeface="Georgia"/>
+              </a:rPr>
+              <a:t>Does it say where the evidence came from?</a:t>
+            </a:r>
+          </a:p>
+        </p:txBody>
+      </p:sp>
+      <p:sp>
+        <p:nvSpPr>
+          <p:cNvPr id="16" name="TextBox 15"/>
+          <p:cNvSpPr txBox="1"/>
+          <p:nvPr/>
+        </p:nvSpPr>
+        <p:spPr>
+          <a:xfrm>
+            <a:off x="1417320" y="2761488"/>
             <a:ext cx="6821424" cy="256031"/>
           </a:xfrm>
           <a:prstGeom prst="rect">
@@ -9004,22 +9056,22 @@
                 <a:solidFill>
                   <a:srgbClr val="56524B"/>
                 </a:solidFill>
-                <a:latin typeface="Karla"/>
-              </a:rPr>
-              <a:t>Not bigger, not smaller, than what the cards show.</a:t>
-            </a:r>
-          </a:p>
-        </p:txBody>
-      </p:sp>
-      <p:sp>
-        <p:nvSpPr>
-          <p:cNvPr id="12" name="Rectangle 11"/>
+                <a:latin typeface="Calibri"/>
+              </a:rPr>
+              <a:t>A study, a document, a person with a name.</a:t>
+            </a:r>
+          </a:p>
+        </p:txBody>
+      </p:sp>
+      <p:sp>
+        <p:nvSpPr>
+          <p:cNvPr id="17" name="Rectangle 16"/>
           <p:cNvSpPr/>
           <p:nvPr/>
         </p:nvSpPr>
         <p:spPr>
           <a:xfrm>
-            <a:off x="685800" y="2414016"/>
+            <a:off x="685800" y="3236976"/>
             <a:ext cx="7772400" cy="676656"/>
           </a:xfrm>
           <a:prstGeom prst="rect">
@@ -9057,13 +9109,13 @@
       </p:sp>
       <p:sp>
         <p:nvSpPr>
-          <p:cNvPr id="13" name="Oval 12"/>
+          <p:cNvPr id="18" name="Oval 17"/>
           <p:cNvSpPr/>
           <p:nvPr/>
         </p:nvSpPr>
         <p:spPr>
           <a:xfrm>
-            <a:off x="868680" y="2551176"/>
+            <a:off x="868680" y="3374136"/>
             <a:ext cx="402336" cy="402336"/>
           </a:xfrm>
           <a:prstGeom prst="ellipse">
@@ -9101,223 +9153,6 @@
       </p:sp>
       <p:sp>
         <p:nvSpPr>
-          <p:cNvPr id="14" name="TextBox 13"/>
-          <p:cNvSpPr txBox="1"/>
-          <p:nvPr/>
-        </p:nvSpPr>
-        <p:spPr>
-          <a:xfrm>
-            <a:off x="868680" y="2647188"/>
-            <a:ext cx="402336" cy="219456"/>
-          </a:xfrm>
-          <a:prstGeom prst="rect">
-            <a:avLst/>
-          </a:prstGeom>
-          <a:noFill/>
-          <a:effectLst/>
-        </p:spPr>
-        <p:txBody>
-          <a:bodyPr wrap="square" anchor="t" lIns="0" rIns="0" tIns="0" bIns="0">
-            <a:spAutoFit/>
-          </a:bodyPr>
-          <a:lstStyle/>
-          <a:p>
-            <a:pPr algn="ctr">
-              <a:lnSpc>
-                <a:spcPct val="125000"/>
-              </a:lnSpc>
-              <a:spcAft>
-                <a:spcPts val="0"/>
-              </a:spcAft>
-            </a:pPr>
-            <a:r>
-              <a:rPr sz="1150" b="1" i="0">
-                <a:solidFill>
-                  <a:srgbClr val="FFFDF7"/>
-                </a:solidFill>
-                <a:latin typeface="Karla"/>
-              </a:rPr>
-              <a:t>2</a:t>
-            </a:r>
-          </a:p>
-        </p:txBody>
-      </p:sp>
-      <p:sp>
-        <p:nvSpPr>
-          <p:cNvPr id="15" name="TextBox 14"/>
-          <p:cNvSpPr txBox="1"/>
-          <p:nvPr/>
-        </p:nvSpPr>
-        <p:spPr>
-          <a:xfrm>
-            <a:off x="1417320" y="2514600"/>
-            <a:ext cx="6821424" cy="237744"/>
-          </a:xfrm>
-          <a:prstGeom prst="rect">
-            <a:avLst/>
-          </a:prstGeom>
-          <a:noFill/>
-          <a:effectLst/>
-        </p:spPr>
-        <p:txBody>
-          <a:bodyPr wrap="square" anchor="t" lIns="0" rIns="0" tIns="0" bIns="0">
-            <a:spAutoFit/>
-          </a:bodyPr>
-          <a:lstStyle/>
-          <a:p>
-            <a:pPr algn="l">
-              <a:lnSpc>
-                <a:spcPct val="125000"/>
-              </a:lnSpc>
-              <a:spcAft>
-                <a:spcPts val="0"/>
-              </a:spcAft>
-            </a:pPr>
-            <a:r>
-              <a:rPr sz="1300" b="1" i="0">
-                <a:solidFill>
-                  <a:srgbClr val="34322F"/>
-                </a:solidFill>
-                <a:latin typeface="Libre Caslon Display"/>
-              </a:rPr>
-              <a:t>Does it say where the evidence came from?</a:t>
-            </a:r>
-          </a:p>
-        </p:txBody>
-      </p:sp>
-      <p:sp>
-        <p:nvSpPr>
-          <p:cNvPr id="16" name="TextBox 15"/>
-          <p:cNvSpPr txBox="1"/>
-          <p:nvPr/>
-        </p:nvSpPr>
-        <p:spPr>
-          <a:xfrm>
-            <a:off x="1417320" y="2761488"/>
-            <a:ext cx="6821424" cy="256031"/>
-          </a:xfrm>
-          <a:prstGeom prst="rect">
-            <a:avLst/>
-          </a:prstGeom>
-          <a:noFill/>
-          <a:effectLst/>
-        </p:spPr>
-        <p:txBody>
-          <a:bodyPr wrap="square" anchor="t" lIns="0" rIns="0" tIns="0" bIns="0">
-            <a:spAutoFit/>
-          </a:bodyPr>
-          <a:lstStyle/>
-          <a:p>
-            <a:pPr algn="l">
-              <a:lnSpc>
-                <a:spcPct val="125000"/>
-              </a:lnSpc>
-              <a:spcAft>
-                <a:spcPts val="0"/>
-              </a:spcAft>
-            </a:pPr>
-            <a:r>
-              <a:rPr sz="1100" b="0" i="0">
-                <a:solidFill>
-                  <a:srgbClr val="56524B"/>
-                </a:solidFill>
-                <a:latin typeface="Karla"/>
-              </a:rPr>
-              <a:t>A study, a document, a person with a name.</a:t>
-            </a:r>
-          </a:p>
-        </p:txBody>
-      </p:sp>
-      <p:sp>
-        <p:nvSpPr>
-          <p:cNvPr id="17" name="Rectangle 16"/>
-          <p:cNvSpPr/>
-          <p:nvPr/>
-        </p:nvSpPr>
-        <p:spPr>
-          <a:xfrm>
-            <a:off x="685800" y="3236976"/>
-            <a:ext cx="7772400" cy="676656"/>
-          </a:xfrm>
-          <a:prstGeom prst="rect">
-            <a:avLst/>
-          </a:prstGeom>
-          <a:solidFill>
-            <a:srgbClr val="FFFDF7"/>
-          </a:solidFill>
-          <a:ln>
-            <a:noFill/>
-          </a:ln>
-          <a:effectLst/>
-        </p:spPr>
-        <p:style>
-          <a:lnRef idx="1">
-            <a:schemeClr val="accent1"/>
-          </a:lnRef>
-          <a:fillRef idx="3">
-            <a:schemeClr val="accent1"/>
-          </a:fillRef>
-          <a:effectRef idx="0">
-            <a:schemeClr val="accent1"/>
-          </a:effectRef>
-          <a:fontRef idx="minor">
-            <a:schemeClr val="lt1"/>
-          </a:fontRef>
-        </p:style>
-        <p:txBody>
-          <a:bodyPr rtlCol="0" anchor="ctr"/>
-          <a:lstStyle/>
-          <a:p>
-            <a:pPr algn="ctr"/>
-          </a:p>
-        </p:txBody>
-      </p:sp>
-      <p:sp>
-        <p:nvSpPr>
-          <p:cNvPr id="18" name="Oval 17"/>
-          <p:cNvSpPr/>
-          <p:nvPr/>
-        </p:nvSpPr>
-        <p:spPr>
-          <a:xfrm>
-            <a:off x="868680" y="3374136"/>
-            <a:ext cx="402336" cy="402336"/>
-          </a:xfrm>
-          <a:prstGeom prst="ellipse">
-            <a:avLst/>
-          </a:prstGeom>
-          <a:solidFill>
-            <a:srgbClr val="34322F"/>
-          </a:solidFill>
-          <a:ln>
-            <a:noFill/>
-          </a:ln>
-          <a:effectLst/>
-        </p:spPr>
-        <p:style>
-          <a:lnRef idx="1">
-            <a:schemeClr val="accent1"/>
-          </a:lnRef>
-          <a:fillRef idx="3">
-            <a:schemeClr val="accent1"/>
-          </a:fillRef>
-          <a:effectRef idx="0">
-            <a:schemeClr val="accent1"/>
-          </a:effectRef>
-          <a:fontRef idx="minor">
-            <a:schemeClr val="lt1"/>
-          </a:fontRef>
-        </p:style>
-        <p:txBody>
-          <a:bodyPr rtlCol="0" anchor="ctr"/>
-          <a:lstStyle/>
-          <a:p>
-            <a:pPr algn="ctr"/>
-          </a:p>
-        </p:txBody>
-      </p:sp>
-      <p:sp>
-        <p:nvSpPr>
           <p:cNvPr id="19" name="TextBox 18"/>
           <p:cNvSpPr txBox="1"/>
           <p:nvPr/>
@@ -9352,7 +9187,7 @@
                 <a:solidFill>
                   <a:srgbClr val="FFFDF7"/>
                 </a:solidFill>
-                <a:latin typeface="Karla"/>
+                <a:latin typeface="Calibri"/>
               </a:rPr>
               <a:t>3</a:t>
             </a:r>
@@ -9391,11 +9226,11 @@
               </a:spcAft>
             </a:pPr>
             <a:r>
-              <a:rPr sz="1300" b="1" i="0">
+              <a:rPr sz="1300" b="0" i="0">
                 <a:solidFill>
                   <a:srgbClr val="34322F"/>
                 </a:solidFill>
-                <a:latin typeface="Libre Caslon Display"/>
+                <a:latin typeface="Georgia"/>
               </a:rPr>
               <a:t>Would it survive the five questions?</a:t>
             </a:r>
@@ -9438,7 +9273,7 @@
                 <a:solidFill>
                   <a:srgbClr val="56524B"/>
                 </a:solidFill>
-                <a:latin typeface="Karla"/>
+                <a:latin typeface="Calibri"/>
               </a:rPr>
               <a:t>Try one or two of them on it.</a:t>
             </a:r>
@@ -9481,7 +9316,7 @@
                 <a:solidFill>
                   <a:srgbClr val="34322F"/>
                 </a:solidFill>
-                <a:latin typeface="Karla"/>
+                <a:latin typeface="Calibri"/>
               </a:rPr>
               <a:t>Write one change that would make it better, then hand it back.</a:t>
             </a:r>
@@ -9549,7 +9384,7 @@
                 <a:solidFill>
                   <a:srgbClr val="8C877D"/>
                 </a:solidFill>
-                <a:latin typeface="Karla"/>
+                <a:latin typeface="Calibri"/>
               </a:rPr>
               <a:t>The Pastoral Guide</a:t>
             </a:r>
@@ -9592,7 +9427,7 @@
                 <a:solidFill>
                   <a:srgbClr val="8C877D"/>
                 </a:solidFill>
-                <a:latin typeface="Karla"/>
+                <a:latin typeface="Calibri"/>
               </a:rPr>
               <a:t>15 / 19</a:t>
             </a:r>
@@ -9697,7 +9532,7 @@
                 <a:solidFill>
                   <a:srgbClr val="34322F"/>
                 </a:solidFill>
-                <a:latin typeface="Karla"/>
+                <a:latin typeface="Calibri"/>
               </a:rPr>
               <a:t>QUESTION THE HEADLINE  ·  LESSON 4 OF 5</a:t>
             </a:r>
@@ -9736,11 +9571,11 @@
               </a:spcAft>
             </a:pPr>
             <a:r>
-              <a:rPr sz="2800" b="1" i="0">
+              <a:rPr sz="2800" b="0" i="0">
                 <a:solidFill>
                   <a:srgbClr val="262422"/>
                 </a:solidFill>
-                <a:latin typeface="Libre Caslon Display"/>
+                <a:latin typeface="Georgia"/>
               </a:rPr>
               <a:t>What really happened</a:t>
             </a:r>
@@ -9841,7 +9676,7 @@
                 <a:solidFill>
                   <a:srgbClr val="34322F"/>
                 </a:solidFill>
-                <a:latin typeface="Karla"/>
+                <a:latin typeface="Calibri"/>
               </a:rPr>
               <a:t>BUSTED</a:t>
             </a:r>
@@ -9880,11 +9715,11 @@
               </a:spcAft>
             </a:pPr>
             <a:r>
-              <a:rPr sz="1500" b="1" i="0">
+              <a:rPr sz="1500" b="0" i="0">
                 <a:solidFill>
                   <a:srgbClr val="34322F"/>
                 </a:solidFill>
-                <a:latin typeface="Libre Caslon Display"/>
+                <a:latin typeface="Georgia"/>
               </a:rPr>
               <a:t>1923</a:t>
             </a:r>
@@ -9971,7 +9806,7 @@
                 <a:solidFill>
                   <a:srgbClr val="262422"/>
                 </a:solidFill>
-                <a:latin typeface="Karla"/>
+                <a:latin typeface="Calibri"/>
               </a:rPr>
               <a:t>Lead is first added to petrol.</a:t>
             </a:r>
@@ -10010,11 +9845,11 @@
               </a:spcAft>
             </a:pPr>
             <a:r>
-              <a:rPr sz="1500" b="1" i="0">
+              <a:rPr sz="1500" b="0" i="0">
                 <a:solidFill>
                   <a:srgbClr val="34322F"/>
                 </a:solidFill>
-                <a:latin typeface="Libre Caslon Display"/>
+                <a:latin typeface="Georgia"/>
               </a:rPr>
               <a:t>1926</a:t>
             </a:r>
@@ -10101,7 +9936,7 @@
                 <a:solidFill>
                   <a:srgbClr val="262422"/>
                 </a:solidFill>
-                <a:latin typeface="Karla"/>
+                <a:latin typeface="Calibri"/>
               </a:rPr>
               <a:t>A committee finds “no real evidence” of harm, and sales restart.</a:t>
             </a:r>
@@ -10140,11 +9975,11 @@
               </a:spcAft>
             </a:pPr>
             <a:r>
-              <a:rPr sz="1500" b="1" i="0">
+              <a:rPr sz="1500" b="0" i="0">
                 <a:solidFill>
                   <a:srgbClr val="34322F"/>
                 </a:solidFill>
-                <a:latin typeface="Libre Caslon Display"/>
+                <a:latin typeface="Georgia"/>
               </a:rPr>
               <a:t>1965</a:t>
             </a:r>
@@ -10231,7 +10066,7 @@
                 <a:solidFill>
                   <a:srgbClr val="262422"/>
                 </a:solidFill>
-                <a:latin typeface="Karla"/>
+                <a:latin typeface="Calibri"/>
               </a:rPr>
               <a:t>Clair Patterson publishes evidence of lead pollution.</a:t>
             </a:r>
@@ -10270,11 +10105,11 @@
               </a:spcAft>
             </a:pPr>
             <a:r>
-              <a:rPr sz="1500" b="1" i="0">
+              <a:rPr sz="1500" b="0" i="0">
                 <a:solidFill>
                   <a:srgbClr val="34322F"/>
                 </a:solidFill>
-                <a:latin typeface="Libre Caslon Display"/>
+                <a:latin typeface="Georgia"/>
               </a:rPr>
               <a:t>2000</a:t>
             </a:r>
@@ -10361,7 +10196,7 @@
                 <a:solidFill>
                   <a:srgbClr val="262422"/>
                 </a:solidFill>
-                <a:latin typeface="Karla"/>
+                <a:latin typeface="Calibri"/>
               </a:rPr>
               <a:t>The UK bans leaded petrol. 2021: the last country stops.</a:t>
             </a:r>
@@ -10448,7 +10283,7 @@
                 <a:solidFill>
                   <a:srgbClr val="D7D2C8"/>
                 </a:solidFill>
-                <a:latin typeface="Karla"/>
+                <a:latin typeface="Calibri"/>
               </a:rPr>
               <a:t>THE QUESTION THAT WOULD HAVE CAUGHT IT</a:t>
             </a:r>
@@ -10487,11 +10322,11 @@
               </a:spcAft>
             </a:pPr>
             <a:r>
-              <a:rPr sz="1800" b="1" i="0">
+              <a:rPr sz="1800" b="0" i="0">
                 <a:solidFill>
                   <a:srgbClr val="FFFDF7"/>
                 </a:solidFill>
-                <a:latin typeface="Libre Caslon Display"/>
+                <a:latin typeface="Georgia"/>
               </a:rPr>
               <a:t>Has it been tested, and by whom?</a:t>
             </a:r>
@@ -10559,7 +10394,7 @@
                 <a:solidFill>
                   <a:srgbClr val="8C877D"/>
                 </a:solidFill>
-                <a:latin typeface="Karla"/>
+                <a:latin typeface="Calibri"/>
               </a:rPr>
               <a:t>The Pastoral Guide</a:t>
             </a:r>
@@ -10602,7 +10437,7 @@
                 <a:solidFill>
                   <a:srgbClr val="8C877D"/>
                 </a:solidFill>
-                <a:latin typeface="Karla"/>
+                <a:latin typeface="Calibri"/>
               </a:rPr>
               <a:t>16 / 19</a:t>
             </a:r>
@@ -10707,64 +10542,9 @@
                 <a:solidFill>
                   <a:srgbClr val="34322F"/>
                 </a:solidFill>
-                <a:latin typeface="Karla"/>
+                <a:latin typeface="Calibri"/>
               </a:rPr>
               <a:t>QUESTION THE HEADLINE  ·  LESSON 4 OF 5</a:t>
-            </a:r>
-          </a:p>
-        </p:txBody>
-      </p:sp>
-      <p:sp>
-        <p:nvSpPr>
-          <p:cNvPr id="4" name="Rounded Rectangle 3"/>
-          <p:cNvSpPr/>
-          <p:nvPr/>
-        </p:nvSpPr>
-        <p:spPr>
-          <a:xfrm>
-            <a:off x="7640472" y="246888"/>
-            <a:ext cx="817727" cy="237744"/>
-          </a:xfrm>
-          <a:prstGeom prst="roundRect">
-            <a:avLst>
-              <a:gd name="adj" fmla="val 50000"/>
-            </a:avLst>
-          </a:prstGeom>
-          <a:solidFill>
-            <a:srgbClr val="34322F"/>
-          </a:solidFill>
-          <a:ln>
-            <a:noFill/>
-          </a:ln>
-          <a:effectLst/>
-        </p:spPr>
-        <p:style>
-          <a:lnRef idx="1">
-            <a:schemeClr val="accent1"/>
-          </a:lnRef>
-          <a:fillRef idx="3">
-            <a:schemeClr val="accent1"/>
-          </a:fillRef>
-          <a:effectRef idx="0">
-            <a:schemeClr val="accent1"/>
-          </a:effectRef>
-          <a:fontRef idx="minor">
-            <a:schemeClr val="lt1"/>
-          </a:fontRef>
-        </p:style>
-        <p:txBody>
-          <a:bodyPr rtlCol="0" anchor="ctr" wrap="none" lIns="0" rIns="0" tIns="0" bIns="0"/>
-          <a:lstStyle/>
-          <a:p>
-            <a:pPr algn="ctr"/>
-            <a:r>
-              <a:rPr sz="950" b="1" spc="90">
-                <a:solidFill>
-                  <a:srgbClr val="FFFDF7"/>
-                </a:solidFill>
-                <a:latin typeface="Karla"/>
-              </a:rPr>
-              <a:t>ARGUE</a:t>
             </a:r>
           </a:p>
         </p:txBody>
@@ -10805,7 +10585,7 @@
                 <a:solidFill>
                   <a:srgbClr val="56524B"/>
                 </a:solidFill>
-                <a:latin typeface="Karla"/>
+                <a:latin typeface="Calibri"/>
               </a:rPr>
               <a:t>NO RIGHT ANSWER</a:t>
             </a:r>
@@ -10938,11 +10718,11 @@
               </a:spcAft>
             </a:pPr>
             <a:r>
-              <a:rPr sz="2200" b="1" i="0">
+              <a:rPr sz="2200" b="0" i="0">
                 <a:solidFill>
                   <a:srgbClr val="262422"/>
                 </a:solidFill>
-                <a:latin typeface="Libre Caslon Display"/>
+                <a:latin typeface="Georgia"/>
               </a:rPr>
               <a:t>“No real evidence of harm” and “safe” are not the same thing. Who should have to do the proving: the people selling something, or the people worried about it?</a:t>
             </a:r>
@@ -10985,7 +10765,7 @@
                 <a:solidFill>
                   <a:srgbClr val="34322F"/>
                 </a:solidFill>
-                <a:latin typeface="Karla"/>
+                <a:latin typeface="Calibri"/>
               </a:rPr>
               <a:t>Two minutes with the person next to you, then we hear from a few.</a:t>
             </a:r>
@@ -11053,7 +10833,7 @@
                 <a:solidFill>
                   <a:srgbClr val="8C877D"/>
                 </a:solidFill>
-                <a:latin typeface="Karla"/>
+                <a:latin typeface="Calibri"/>
               </a:rPr>
               <a:t>The Pastoral Guide</a:t>
             </a:r>
@@ -11096,7 +10876,7 @@
                 <a:solidFill>
                   <a:srgbClr val="8C877D"/>
                 </a:solidFill>
-                <a:latin typeface="Karla"/>
+                <a:latin typeface="Calibri"/>
               </a:rPr>
               <a:t>17 / 19</a:t>
             </a:r>
@@ -11201,7 +10981,7 @@
                 <a:solidFill>
                   <a:srgbClr val="34322F"/>
                 </a:solidFill>
-                <a:latin typeface="Karla"/>
+                <a:latin typeface="Calibri"/>
               </a:rPr>
               <a:t>QUESTION THE HEADLINE  ·  LESSON 4 OF 5</a:t>
             </a:r>
@@ -11210,19 +10990,104 @@
       </p:sp>
       <p:sp>
         <p:nvSpPr>
-          <p:cNvPr id="4" name="Rounded Rectangle 3"/>
+          <p:cNvPr id="5" name="TextBox 4"/>
+          <p:cNvSpPr txBox="1"/>
+          <p:nvPr/>
+        </p:nvSpPr>
+        <p:spPr>
+          <a:xfrm>
+            <a:off x="685800" y="566928"/>
+            <a:ext cx="7772400" cy="434848"/>
+          </a:xfrm>
+          <a:prstGeom prst="rect">
+            <a:avLst/>
+          </a:prstGeom>
+          <a:noFill/>
+          <a:effectLst/>
+        </p:spPr>
+        <p:txBody>
+          <a:bodyPr wrap="square" anchor="t" lIns="0" rIns="0" tIns="0" bIns="0">
+            <a:spAutoFit/>
+          </a:bodyPr>
+          <a:lstStyle/>
+          <a:p>
+            <a:pPr algn="l">
+              <a:lnSpc>
+                <a:spcPct val="105000"/>
+              </a:lnSpc>
+              <a:spcAft>
+                <a:spcPts val="0"/>
+              </a:spcAft>
+            </a:pPr>
+            <a:r>
+              <a:rPr sz="2800" b="0" i="0">
+                <a:solidFill>
+                  <a:srgbClr val="262422"/>
+                </a:solidFill>
+                <a:latin typeface="Georgia"/>
+              </a:rPr>
+              <a:t>Two questions, just for you</a:t>
+            </a:r>
+          </a:p>
+        </p:txBody>
+      </p:sp>
+      <p:sp>
+        <p:nvSpPr>
+          <p:cNvPr id="6" name="Rectangle 5"/>
           <p:cNvSpPr/>
           <p:nvPr/>
         </p:nvSpPr>
         <p:spPr>
           <a:xfrm>
-            <a:off x="7486248" y="246888"/>
-            <a:ext cx="971951" cy="237744"/>
-          </a:xfrm>
-          <a:prstGeom prst="roundRect">
-            <a:avLst>
-              <a:gd name="adj" fmla="val 50000"/>
-            </a:avLst>
+            <a:off x="685800" y="1371600"/>
+            <a:ext cx="7772400" cy="946403"/>
+          </a:xfrm>
+          <a:prstGeom prst="rect">
+            <a:avLst/>
+          </a:prstGeom>
+          <a:solidFill>
+            <a:srgbClr val="FFFFFF"/>
+          </a:solidFill>
+          <a:ln>
+            <a:noFill/>
+          </a:ln>
+          <a:effectLst/>
+        </p:spPr>
+        <p:style>
+          <a:lnRef idx="1">
+            <a:schemeClr val="accent1"/>
+          </a:lnRef>
+          <a:fillRef idx="3">
+            <a:schemeClr val="accent1"/>
+          </a:fillRef>
+          <a:effectRef idx="0">
+            <a:schemeClr val="accent1"/>
+          </a:effectRef>
+          <a:fontRef idx="minor">
+            <a:schemeClr val="lt1"/>
+          </a:fontRef>
+        </p:style>
+        <p:txBody>
+          <a:bodyPr rtlCol="0" anchor="ctr"/>
+          <a:lstStyle/>
+          <a:p>
+            <a:pPr algn="ctr"/>
+          </a:p>
+        </p:txBody>
+      </p:sp>
+      <p:sp>
+        <p:nvSpPr>
+          <p:cNvPr id="7" name="Rectangle 6"/>
+          <p:cNvSpPr/>
+          <p:nvPr/>
+        </p:nvSpPr>
+        <p:spPr>
+          <a:xfrm>
+            <a:off x="685800" y="1371600"/>
+            <a:ext cx="45720" cy="946403"/>
+          </a:xfrm>
+          <a:prstGeom prst="rect">
+            <a:avLst/>
           </a:prstGeom>
           <a:solidFill>
             <a:srgbClr val="34322F"/>
@@ -11247,32 +11112,110 @@
           </a:fontRef>
         </p:style>
         <p:txBody>
-          <a:bodyPr rtlCol="0" anchor="ctr" wrap="none" lIns="0" rIns="0" tIns="0" bIns="0"/>
+          <a:bodyPr rtlCol="0" anchor="ctr"/>
           <a:lstStyle/>
           <a:p>
             <a:pPr algn="ctr"/>
-            <a:r>
-              <a:rPr sz="950" b="1" spc="90">
+          </a:p>
+        </p:txBody>
+      </p:sp>
+      <p:sp>
+        <p:nvSpPr>
+          <p:cNvPr id="8" name="Oval 7"/>
+          <p:cNvSpPr/>
+          <p:nvPr/>
+        </p:nvSpPr>
+        <p:spPr>
+          <a:xfrm>
+            <a:off x="896112" y="1643634"/>
+            <a:ext cx="402336" cy="402336"/>
+          </a:xfrm>
+          <a:prstGeom prst="ellipse">
+            <a:avLst/>
+          </a:prstGeom>
+          <a:solidFill>
+            <a:srgbClr val="34322F"/>
+          </a:solidFill>
+          <a:ln>
+            <a:noFill/>
+          </a:ln>
+          <a:effectLst/>
+        </p:spPr>
+        <p:style>
+          <a:lnRef idx="1">
+            <a:schemeClr val="accent1"/>
+          </a:lnRef>
+          <a:fillRef idx="3">
+            <a:schemeClr val="accent1"/>
+          </a:fillRef>
+          <a:effectRef idx="0">
+            <a:schemeClr val="accent1"/>
+          </a:effectRef>
+          <a:fontRef idx="minor">
+            <a:schemeClr val="lt1"/>
+          </a:fontRef>
+        </p:style>
+        <p:txBody>
+          <a:bodyPr rtlCol="0" anchor="ctr"/>
+          <a:lstStyle/>
+          <a:p>
+            <a:pPr algn="ctr"/>
+          </a:p>
+        </p:txBody>
+      </p:sp>
+      <p:sp>
+        <p:nvSpPr>
+          <p:cNvPr id="9" name="TextBox 8"/>
+          <p:cNvSpPr txBox="1"/>
+          <p:nvPr/>
+        </p:nvSpPr>
+        <p:spPr>
+          <a:xfrm>
+            <a:off x="896112" y="1735074"/>
+            <a:ext cx="402336" cy="219456"/>
+          </a:xfrm>
+          <a:prstGeom prst="rect">
+            <a:avLst/>
+          </a:prstGeom>
+          <a:noFill/>
+          <a:effectLst/>
+        </p:spPr>
+        <p:txBody>
+          <a:bodyPr wrap="square" anchor="t" lIns="0" rIns="0" tIns="0" bIns="0">
+            <a:spAutoFit/>
+          </a:bodyPr>
+          <a:lstStyle/>
+          <a:p>
+            <a:pPr algn="ctr">
+              <a:lnSpc>
+                <a:spcPct val="125000"/>
+              </a:lnSpc>
+              <a:spcAft>
+                <a:spcPts val="0"/>
+              </a:spcAft>
+            </a:pPr>
+            <a:r>
+              <a:rPr sz="1200" b="1" i="0">
                 <a:solidFill>
                   <a:srgbClr val="FFFDF7"/>
                 </a:solidFill>
-                <a:latin typeface="Karla"/>
-              </a:rPr>
-              <a:t>FOR YOU</a:t>
-            </a:r>
-          </a:p>
-        </p:txBody>
-      </p:sp>
-      <p:sp>
-        <p:nvSpPr>
-          <p:cNvPr id="5" name="TextBox 4"/>
-          <p:cNvSpPr txBox="1"/>
-          <p:nvPr/>
-        </p:nvSpPr>
-        <p:spPr>
-          <a:xfrm>
-            <a:off x="685800" y="566928"/>
-            <a:ext cx="7772400" cy="434848"/>
+                <a:latin typeface="Calibri"/>
+              </a:rPr>
+              <a:t>1</a:t>
+            </a:r>
+          </a:p>
+        </p:txBody>
+      </p:sp>
+      <p:sp>
+        <p:nvSpPr>
+          <p:cNvPr id="10" name="TextBox 9"/>
+          <p:cNvSpPr txBox="1"/>
+          <p:nvPr/>
+        </p:nvSpPr>
+        <p:spPr>
+          <a:xfrm>
+            <a:off x="1554480" y="1572768"/>
+            <a:ext cx="6675120" cy="544068"/>
           </a:xfrm>
           <a:prstGeom prst="rect">
             <a:avLst/>
@@ -11288,33 +11231,33 @@
           <a:p>
             <a:pPr algn="l">
               <a:lnSpc>
-                <a:spcPct val="105000"/>
-              </a:lnSpc>
-              <a:spcAft>
-                <a:spcPts val="0"/>
-              </a:spcAft>
-            </a:pPr>
-            <a:r>
-              <a:rPr sz="2800" b="1" i="0">
+                <a:spcPct val="115000"/>
+              </a:lnSpc>
+              <a:spcAft>
+                <a:spcPts val="0"/>
+              </a:spcAft>
+            </a:pPr>
+            <a:r>
+              <a:rPr sz="1700" b="0" i="0">
                 <a:solidFill>
                   <a:srgbClr val="262422"/>
                 </a:solidFill>
-                <a:latin typeface="Libre Caslon Display"/>
-              </a:rPr>
-              <a:t>Two questions, just for you</a:t>
-            </a:r>
-          </a:p>
-        </p:txBody>
-      </p:sp>
-      <p:sp>
-        <p:nvSpPr>
-          <p:cNvPr id="6" name="Rectangle 5"/>
+                <a:latin typeface="Georgia"/>
+              </a:rPr>
+              <a:t>Where did you move on the line, and which card moved you?</a:t>
+            </a:r>
+          </a:p>
+        </p:txBody>
+      </p:sp>
+      <p:sp>
+        <p:nvSpPr>
+          <p:cNvPr id="11" name="Rectangle 10"/>
           <p:cNvSpPr/>
           <p:nvPr/>
         </p:nvSpPr>
         <p:spPr>
           <a:xfrm>
-            <a:off x="685800" y="1371600"/>
+            <a:off x="685800" y="2537460"/>
             <a:ext cx="7772400" cy="946403"/>
           </a:xfrm>
           <a:prstGeom prst="rect">
@@ -11352,13 +11295,13 @@
       </p:sp>
       <p:sp>
         <p:nvSpPr>
-          <p:cNvPr id="7" name="Rectangle 6"/>
+          <p:cNvPr id="12" name="Rectangle 11"/>
           <p:cNvSpPr/>
           <p:nvPr/>
         </p:nvSpPr>
         <p:spPr>
           <a:xfrm>
-            <a:off x="685800" y="1371600"/>
+            <a:off x="685800" y="2537460"/>
             <a:ext cx="45720" cy="946403"/>
           </a:xfrm>
           <a:prstGeom prst="rect">
@@ -11396,13 +11339,13 @@
       </p:sp>
       <p:sp>
         <p:nvSpPr>
-          <p:cNvPr id="8" name="Oval 7"/>
+          <p:cNvPr id="13" name="Oval 12"/>
           <p:cNvSpPr/>
           <p:nvPr/>
         </p:nvSpPr>
         <p:spPr>
           <a:xfrm>
-            <a:off x="896112" y="1643634"/>
+            <a:off x="896112" y="2809494"/>
             <a:ext cx="402336" cy="402336"/>
           </a:xfrm>
           <a:prstGeom prst="ellipse">
@@ -11440,224 +11383,6 @@
       </p:sp>
       <p:sp>
         <p:nvSpPr>
-          <p:cNvPr id="9" name="TextBox 8"/>
-          <p:cNvSpPr txBox="1"/>
-          <p:nvPr/>
-        </p:nvSpPr>
-        <p:spPr>
-          <a:xfrm>
-            <a:off x="896112" y="1735074"/>
-            <a:ext cx="402336" cy="219456"/>
-          </a:xfrm>
-          <a:prstGeom prst="rect">
-            <a:avLst/>
-          </a:prstGeom>
-          <a:noFill/>
-          <a:effectLst/>
-        </p:spPr>
-        <p:txBody>
-          <a:bodyPr wrap="square" anchor="t" lIns="0" rIns="0" tIns="0" bIns="0">
-            <a:spAutoFit/>
-          </a:bodyPr>
-          <a:lstStyle/>
-          <a:p>
-            <a:pPr algn="ctr">
-              <a:lnSpc>
-                <a:spcPct val="125000"/>
-              </a:lnSpc>
-              <a:spcAft>
-                <a:spcPts val="0"/>
-              </a:spcAft>
-            </a:pPr>
-            <a:r>
-              <a:rPr sz="1200" b="1" i="0">
-                <a:solidFill>
-                  <a:srgbClr val="FFFDF7"/>
-                </a:solidFill>
-                <a:latin typeface="Karla"/>
-              </a:rPr>
-              <a:t>1</a:t>
-            </a:r>
-          </a:p>
-        </p:txBody>
-      </p:sp>
-      <p:sp>
-        <p:nvSpPr>
-          <p:cNvPr id="10" name="TextBox 9"/>
-          <p:cNvSpPr txBox="1"/>
-          <p:nvPr/>
-        </p:nvSpPr>
-        <p:spPr>
-          <a:xfrm>
-            <a:off x="1554480" y="1572768"/>
-            <a:ext cx="6675120" cy="544068"/>
-          </a:xfrm>
-          <a:prstGeom prst="rect">
-            <a:avLst/>
-          </a:prstGeom>
-          <a:noFill/>
-          <a:effectLst/>
-        </p:spPr>
-        <p:txBody>
-          <a:bodyPr wrap="square" anchor="t" lIns="0" rIns="0" tIns="0" bIns="0">
-            <a:spAutoFit/>
-          </a:bodyPr>
-          <a:lstStyle/>
-          <a:p>
-            <a:pPr algn="l">
-              <a:lnSpc>
-                <a:spcPct val="115000"/>
-              </a:lnSpc>
-              <a:spcAft>
-                <a:spcPts val="0"/>
-              </a:spcAft>
-            </a:pPr>
-            <a:r>
-              <a:rPr sz="1700" b="1" i="0">
-                <a:solidFill>
-                  <a:srgbClr val="262422"/>
-                </a:solidFill>
-                <a:latin typeface="Libre Caslon Display"/>
-              </a:rPr>
-              <a:t>Where did you move on the line, and which card moved you?</a:t>
-            </a:r>
-          </a:p>
-        </p:txBody>
-      </p:sp>
-      <p:sp>
-        <p:nvSpPr>
-          <p:cNvPr id="11" name="Rectangle 10"/>
-          <p:cNvSpPr/>
-          <p:nvPr/>
-        </p:nvSpPr>
-        <p:spPr>
-          <a:xfrm>
-            <a:off x="685800" y="2537460"/>
-            <a:ext cx="7772400" cy="946403"/>
-          </a:xfrm>
-          <a:prstGeom prst="rect">
-            <a:avLst/>
-          </a:prstGeom>
-          <a:solidFill>
-            <a:srgbClr val="FFFFFF"/>
-          </a:solidFill>
-          <a:ln>
-            <a:noFill/>
-          </a:ln>
-          <a:effectLst/>
-        </p:spPr>
-        <p:style>
-          <a:lnRef idx="1">
-            <a:schemeClr val="accent1"/>
-          </a:lnRef>
-          <a:fillRef idx="3">
-            <a:schemeClr val="accent1"/>
-          </a:fillRef>
-          <a:effectRef idx="0">
-            <a:schemeClr val="accent1"/>
-          </a:effectRef>
-          <a:fontRef idx="minor">
-            <a:schemeClr val="lt1"/>
-          </a:fontRef>
-        </p:style>
-        <p:txBody>
-          <a:bodyPr rtlCol="0" anchor="ctr"/>
-          <a:lstStyle/>
-          <a:p>
-            <a:pPr algn="ctr"/>
-          </a:p>
-        </p:txBody>
-      </p:sp>
-      <p:sp>
-        <p:nvSpPr>
-          <p:cNvPr id="12" name="Rectangle 11"/>
-          <p:cNvSpPr/>
-          <p:nvPr/>
-        </p:nvSpPr>
-        <p:spPr>
-          <a:xfrm>
-            <a:off x="685800" y="2537460"/>
-            <a:ext cx="45720" cy="946403"/>
-          </a:xfrm>
-          <a:prstGeom prst="rect">
-            <a:avLst/>
-          </a:prstGeom>
-          <a:solidFill>
-            <a:srgbClr val="34322F"/>
-          </a:solidFill>
-          <a:ln>
-            <a:noFill/>
-          </a:ln>
-          <a:effectLst/>
-        </p:spPr>
-        <p:style>
-          <a:lnRef idx="1">
-            <a:schemeClr val="accent1"/>
-          </a:lnRef>
-          <a:fillRef idx="3">
-            <a:schemeClr val="accent1"/>
-          </a:fillRef>
-          <a:effectRef idx="0">
-            <a:schemeClr val="accent1"/>
-          </a:effectRef>
-          <a:fontRef idx="minor">
-            <a:schemeClr val="lt1"/>
-          </a:fontRef>
-        </p:style>
-        <p:txBody>
-          <a:bodyPr rtlCol="0" anchor="ctr"/>
-          <a:lstStyle/>
-          <a:p>
-            <a:pPr algn="ctr"/>
-          </a:p>
-        </p:txBody>
-      </p:sp>
-      <p:sp>
-        <p:nvSpPr>
-          <p:cNvPr id="13" name="Oval 12"/>
-          <p:cNvSpPr/>
-          <p:nvPr/>
-        </p:nvSpPr>
-        <p:spPr>
-          <a:xfrm>
-            <a:off x="896112" y="2809494"/>
-            <a:ext cx="402336" cy="402336"/>
-          </a:xfrm>
-          <a:prstGeom prst="ellipse">
-            <a:avLst/>
-          </a:prstGeom>
-          <a:solidFill>
-            <a:srgbClr val="34322F"/>
-          </a:solidFill>
-          <a:ln>
-            <a:noFill/>
-          </a:ln>
-          <a:effectLst/>
-        </p:spPr>
-        <p:style>
-          <a:lnRef idx="1">
-            <a:schemeClr val="accent1"/>
-          </a:lnRef>
-          <a:fillRef idx="3">
-            <a:schemeClr val="accent1"/>
-          </a:fillRef>
-          <a:effectRef idx="0">
-            <a:schemeClr val="accent1"/>
-          </a:effectRef>
-          <a:fontRef idx="minor">
-            <a:schemeClr val="lt1"/>
-          </a:fontRef>
-        </p:style>
-        <p:txBody>
-          <a:bodyPr rtlCol="0" anchor="ctr"/>
-          <a:lstStyle/>
-          <a:p>
-            <a:pPr algn="ctr"/>
-          </a:p>
-        </p:txBody>
-      </p:sp>
-      <p:sp>
-        <p:nvSpPr>
           <p:cNvPr id="14" name="TextBox 13"/>
           <p:cNvSpPr txBox="1"/>
           <p:nvPr/>
@@ -11692,7 +11417,7 @@
                 <a:solidFill>
                   <a:srgbClr val="FFFDF7"/>
                 </a:solidFill>
-                <a:latin typeface="Karla"/>
+                <a:latin typeface="Calibri"/>
               </a:rPr>
               <a:t>2</a:t>
             </a:r>
@@ -11731,11 +11456,11 @@
               </a:spcAft>
             </a:pPr>
             <a:r>
-              <a:rPr sz="1700" b="1" i="0">
+              <a:rPr sz="1700" b="0" i="0">
                 <a:solidFill>
                   <a:srgbClr val="262422"/>
                 </a:solidFill>
-                <a:latin typeface="Libre Caslon Display"/>
+                <a:latin typeface="Georgia"/>
               </a:rPr>
               <a:t>Next time you see a headline, which of the five questions will you ask first?</a:t>
             </a:r>
@@ -11778,7 +11503,7 @@
                 <a:solidFill>
                   <a:srgbClr val="34322F"/>
                 </a:solidFill>
-                <a:latin typeface="Karla"/>
+                <a:latin typeface="Calibri"/>
               </a:rPr>
               <a:t>Write your answers in the last box of your evidence sheet. It is yours to keep, and nothing is read out.</a:t>
             </a:r>
@@ -11846,7 +11571,7 @@
                 <a:solidFill>
                   <a:srgbClr val="8C877D"/>
                 </a:solidFill>
-                <a:latin typeface="Karla"/>
+                <a:latin typeface="Calibri"/>
               </a:rPr>
               <a:t>The Pastoral Guide</a:t>
             </a:r>
@@ -11889,7 +11614,7 @@
                 <a:solidFill>
                   <a:srgbClr val="8C877D"/>
                 </a:solidFill>
-                <a:latin typeface="Karla"/>
+                <a:latin typeface="Calibri"/>
               </a:rPr>
               <a:t>18 / 19</a:t>
             </a:r>
@@ -12006,7 +11731,7 @@
                 <a:solidFill>
                   <a:srgbClr val="34322F"/>
                 </a:solidFill>
-                <a:latin typeface="Karla"/>
+                <a:latin typeface="Calibri"/>
               </a:rPr>
               <a:t>FOR THE TEACHER  ·  SOURCES</a:t>
             </a:r>
@@ -12045,11 +11770,11 @@
               </a:spcAft>
             </a:pPr>
             <a:r>
-              <a:rPr sz="2600" b="1" i="0">
+              <a:rPr sz="2600" b="0" i="0">
                 <a:solidFill>
                   <a:srgbClr val="262422"/>
                 </a:solidFill>
-                <a:latin typeface="Libre Caslon Display"/>
+                <a:latin typeface="Georgia"/>
               </a:rPr>
               <a:t>Where the evidence came from</a:t>
             </a:r>
@@ -12092,7 +11817,7 @@
                 <a:solidFill>
                   <a:srgbClr val="262422"/>
                 </a:solidFill>
-                <a:latin typeface="Karla"/>
+                <a:latin typeface="Calibri"/>
               </a:rPr>
               <a:t>Egan K. B. and others (2021). Blood lead levels in U.S. children ages 1–11 years, 1976–2016. Environmental Health Perspectives, 129(3).</a:t>
             </a:r>
@@ -12135,7 +11860,7 @@
                 <a:solidFill>
                   <a:srgbClr val="262422"/>
                 </a:solidFill>
-                <a:latin typeface="Karla"/>
+                <a:latin typeface="Calibri"/>
               </a:rPr>
               <a:t>US Environmental Protection Agency, Report on the Environment: Blood Lead (2023) and America’s Children and the Environment: Lead (2026).</a:t>
             </a:r>
@@ -12178,7 +11903,7 @@
                 <a:solidFill>
                   <a:srgbClr val="262422"/>
                 </a:solidFill>
-                <a:latin typeface="Karla"/>
+                <a:latin typeface="Calibri"/>
               </a:rPr>
               <a:t>UNEP (2021). Era of leaded petrol over. Press release, 30 August 2021.</a:t>
             </a:r>
@@ -12221,7 +11946,7 @@
                 <a:solidFill>
                   <a:srgbClr val="262422"/>
                 </a:solidFill>
-                <a:latin typeface="Karla"/>
+                <a:latin typeface="Calibri"/>
               </a:rPr>
               <a:t>Wikipedia, Tetraethyllead, Robert A. Kehoe and Clair Cameron Patterson, accessed September 2026.</a:t>
             </a:r>
@@ -12264,7 +11989,7 @@
                 <a:solidFill>
                   <a:srgbClr val="262422"/>
                 </a:solidFill>
-                <a:latin typeface="Karla"/>
+                <a:latin typeface="Calibri"/>
               </a:rPr>
               <a:t>Ericson J. E., Shirahata H. and Patterson C. C. (1979). Skeletal concentrations of lead in ancient Peruvians. New England Journal of Medicine, 300, 946–951.</a:t>
             </a:r>
@@ -12332,7 +12057,7 @@
                 <a:solidFill>
                   <a:srgbClr val="8C877D"/>
                 </a:solidFill>
-                <a:latin typeface="Karla"/>
+                <a:latin typeface="Calibri"/>
               </a:rPr>
               <a:t>The Pastoral Guide</a:t>
             </a:r>
@@ -12375,7 +12100,7 @@
                 <a:solidFill>
                   <a:srgbClr val="8C877D"/>
                 </a:solidFill>
-                <a:latin typeface="Karla"/>
+                <a:latin typeface="Calibri"/>
               </a:rPr>
               <a:t>19 / 19</a:t>
             </a:r>
@@ -12492,7 +12217,7 @@
                 <a:solidFill>
                   <a:srgbClr val="34322F"/>
                 </a:solidFill>
-                <a:latin typeface="Karla"/>
+                <a:latin typeface="Calibri"/>
               </a:rPr>
               <a:t>TEACHER SLIDE  ·  SKIP IT</a:t>
             </a:r>
@@ -12531,11 +12256,11 @@
               </a:spcAft>
             </a:pPr>
             <a:r>
-              <a:rPr sz="2800" b="1" i="0">
+              <a:rPr sz="2800" b="0" i="0">
                 <a:solidFill>
                   <a:srgbClr val="262422"/>
                 </a:solidFill>
-                <a:latin typeface="Libre Caslon Display"/>
+                <a:latin typeface="Georgia"/>
               </a:rPr>
               <a:t>Before the lesson</a:t>
             </a:r>
@@ -12578,7 +12303,7 @@
                 <a:solidFill>
                   <a:srgbClr val="56524B"/>
                 </a:solidFill>
-                <a:latin typeface="Karla"/>
+                <a:latin typeface="Calibri"/>
               </a:rPr>
               <a:t>This lesson is about the difference between no evidence of harm and evidence that something is safe.</a:t>
             </a:r>
@@ -12709,7 +12434,7 @@
                 <a:solidFill>
                   <a:srgbClr val="FFFDF7"/>
                 </a:solidFill>
-                <a:latin typeface="Karla"/>
+                <a:latin typeface="Calibri"/>
               </a:rPr>
               <a:t>1</a:t>
             </a:r>
@@ -12748,11 +12473,11 @@
               </a:spcAft>
             </a:pPr>
             <a:r>
-              <a:rPr sz="1300" b="1" i="0">
+              <a:rPr sz="1300" b="0" i="0">
                 <a:solidFill>
                   <a:srgbClr val="262422"/>
                 </a:solidFill>
-                <a:latin typeface="Libre Caslon Display"/>
+                <a:latin typeface="Georgia"/>
               </a:rPr>
               <a:t>Print and cut the evidence cards</a:t>
             </a:r>
@@ -12795,7 +12520,7 @@
                 <a:solidFill>
                   <a:srgbClr val="56524B"/>
                 </a:solidFill>
-                <a:latin typeface="Karla"/>
+                <a:latin typeface="Calibri"/>
               </a:rPr>
               <a:t>One set of four per group of three or four. Keep them in order, A to D.</a:t>
             </a:r>
@@ -12926,7 +12651,7 @@
                 <a:solidFill>
                   <a:srgbClr val="FFFDF7"/>
                 </a:solidFill>
-                <a:latin typeface="Karla"/>
+                <a:latin typeface="Calibri"/>
               </a:rPr>
               <a:t>2</a:t>
             </a:r>
@@ -12965,11 +12690,11 @@
               </a:spcAft>
             </a:pPr>
             <a:r>
-              <a:rPr sz="1300" b="1" i="0">
+              <a:rPr sz="1300" b="0" i="0">
                 <a:solidFill>
                   <a:srgbClr val="262422"/>
                 </a:solidFill>
-                <a:latin typeface="Libre Caslon Display"/>
+                <a:latin typeface="Georgia"/>
               </a:rPr>
               <a:t>Print two sheets per student</a:t>
             </a:r>
@@ -13012,7 +12737,7 @@
                 <a:solidFill>
                   <a:srgbClr val="56524B"/>
                 </a:solidFill>
-                <a:latin typeface="Karla"/>
+                <a:latin typeface="Calibri"/>
               </a:rPr>
               <a:t>This lesson’s evidence sheet, and the front page sheet, which is the same every lesson.</a:t>
             </a:r>
@@ -13143,7 +12868,7 @@
                 <a:solidFill>
                   <a:srgbClr val="FFFDF7"/>
                 </a:solidFill>
-                <a:latin typeface="Karla"/>
+                <a:latin typeface="Calibri"/>
               </a:rPr>
               <a:t>3</a:t>
             </a:r>
@@ -13182,11 +12907,11 @@
               </a:spcAft>
             </a:pPr>
             <a:r>
-              <a:rPr sz="1300" b="1" i="0">
+              <a:rPr sz="1300" b="0" i="0">
                 <a:solidFill>
                   <a:srgbClr val="262422"/>
                 </a:solidFill>
-                <a:latin typeface="Libre Caslon Display"/>
+                <a:latin typeface="Georgia"/>
               </a:rPr>
               <a:t>Mark out the line</a:t>
             </a:r>
@@ -13229,7 +12954,7 @@
                 <a:solidFill>
                   <a:srgbClr val="56524B"/>
                 </a:solidFill>
-                <a:latin typeface="Karla"/>
+                <a:latin typeface="Calibri"/>
               </a:rPr>
               <a:t>A 0 at one end of the room and a 10 at the other: definitely false to definitely true.</a:t>
             </a:r>
@@ -13360,7 +13085,7 @@
                 <a:solidFill>
                   <a:srgbClr val="FFFDF7"/>
                 </a:solidFill>
-                <a:latin typeface="Karla"/>
+                <a:latin typeface="Calibri"/>
               </a:rPr>
               <a:t>4</a:t>
             </a:r>
@@ -13399,11 +13124,11 @@
               </a:spcAft>
             </a:pPr>
             <a:r>
-              <a:rPr sz="1300" b="1" i="0">
+              <a:rPr sz="1300" b="0" i="0">
                 <a:solidFill>
                   <a:srgbClr val="262422"/>
                 </a:solidFill>
-                <a:latin typeface="Libre Caslon Display"/>
+                <a:latin typeface="Georgia"/>
               </a:rPr>
               <a:t>Hold the cards back</a:t>
             </a:r>
@@ -13446,7 +13171,7 @@
                 <a:solidFill>
                   <a:srgbClr val="56524B"/>
                 </a:solidFill>
-                <a:latin typeface="Karla"/>
+                <a:latin typeface="Calibri"/>
               </a:rPr>
               <a:t>Hand out one card per round, never the next one early. The verdict stays hidden until the end.</a:t>
             </a:r>
@@ -13514,7 +13239,7 @@
                 <a:solidFill>
                   <a:srgbClr val="8C877D"/>
                 </a:solidFill>
-                <a:latin typeface="Karla"/>
+                <a:latin typeface="Calibri"/>
               </a:rPr>
               <a:t>The Pastoral Guide</a:t>
             </a:r>
@@ -13557,7 +13282,7 @@
                 <a:solidFill>
                   <a:srgbClr val="8C877D"/>
                 </a:solidFill>
-                <a:latin typeface="Karla"/>
+                <a:latin typeface="Calibri"/>
               </a:rPr>
               <a:t>2 / 19</a:t>
             </a:r>
@@ -13662,7 +13387,7 @@
                 <a:solidFill>
                   <a:srgbClr val="34322F"/>
                 </a:solidFill>
-                <a:latin typeface="Karla"/>
+                <a:latin typeface="Calibri"/>
               </a:rPr>
               <a:t>QUESTION THE HEADLINE  ·  LESSON 4 OF 5</a:t>
             </a:r>
@@ -13705,7 +13430,7 @@
                 <a:solidFill>
                   <a:srgbClr val="8C877D"/>
                 </a:solidFill>
-                <a:latin typeface="Karla"/>
+                <a:latin typeface="Calibri"/>
               </a:rPr>
               <a:t>A recreated front page</a:t>
             </a:r>
@@ -13788,11 +13513,11 @@
               </a:spcAft>
             </a:pPr>
             <a:r>
-              <a:rPr sz="3000" b="1" i="0">
+              <a:rPr sz="3000" b="0" i="0">
                 <a:solidFill>
                   <a:srgbClr val="262422"/>
                 </a:solidFill>
-                <a:latin typeface="Libre Caslon Display"/>
+                <a:latin typeface="Georgia"/>
               </a:rPr>
               <a:t>The Daily Claim</a:t>
             </a:r>
@@ -13879,7 +13604,7 @@
                 <a:solidFill>
                   <a:srgbClr val="56524B"/>
                 </a:solidFill>
-                <a:latin typeface="Karla"/>
+                <a:latin typeface="Calibri"/>
               </a:rPr>
               <a:t>WASHINGTON, 1926</a:t>
             </a:r>
@@ -13922,7 +13647,7 @@
                 <a:solidFill>
                   <a:srgbClr val="56524B"/>
                 </a:solidFill>
-                <a:latin typeface="Karla"/>
+                <a:latin typeface="Calibri"/>
               </a:rPr>
               <a:t>VOLUME ONE</a:t>
             </a:r>
@@ -13965,7 +13690,7 @@
                 <a:solidFill>
                   <a:srgbClr val="56524B"/>
                 </a:solidFill>
-                <a:latin typeface="Karla"/>
+                <a:latin typeface="Calibri"/>
               </a:rPr>
               <a:t>LESSON 4 OF 5</a:t>
             </a:r>
@@ -14048,11 +13773,11 @@
               </a:spcAft>
             </a:pPr>
             <a:r>
-              <a:rPr sz="2800" b="1" i="0">
+              <a:rPr sz="2800" b="0" i="0">
                 <a:solidFill>
                   <a:srgbClr val="262422"/>
                 </a:solidFill>
-                <a:latin typeface="Libre Caslon Display"/>
+                <a:latin typeface="Georgia"/>
               </a:rPr>
               <a:t>LEADED PETROL: ‘NO REAL</a:t>
             </a:r>
@@ -14060,11 +13785,11 @@
               <a:rPr lang="en-GB"/>
             </a:br>
             <a:r>
-              <a:rPr sz="2800" b="1" i="0">
+              <a:rPr sz="2800" b="0" i="0">
                 <a:solidFill>
                   <a:srgbClr val="262422"/>
                 </a:solidFill>
-                <a:latin typeface="Libre Caslon Display"/>
+                <a:latin typeface="Georgia"/>
               </a:rPr>
               <a:t>EVIDENCE’ OF DANGER</a:t>
             </a:r>
@@ -14452,11 +14177,11 @@
               </a:spcAft>
             </a:pPr>
             <a:r>
-              <a:rPr sz="1500" b="1" i="0">
+              <a:rPr sz="1500" b="0" i="0">
                 <a:solidFill>
                   <a:srgbClr val="34322F"/>
                 </a:solidFill>
-                <a:latin typeface="Libre Caslon Display"/>
+                <a:latin typeface="Georgia"/>
               </a:rPr>
               <a:t>There is “no real evidence” that the new fuel harms the public.</a:t>
             </a:r>
@@ -14499,7 +14224,7 @@
                 <a:solidFill>
                   <a:srgbClr val="56524B"/>
                 </a:solidFill>
-                <a:latin typeface="Karla"/>
+                <a:latin typeface="Calibri"/>
               </a:rPr>
               <a:t>WHAT THE COMMITTEE FOUND, 1926</a:t>
             </a:r>
@@ -14567,7 +14292,7 @@
                 <a:solidFill>
                   <a:srgbClr val="8C877D"/>
                 </a:solidFill>
-                <a:latin typeface="Karla"/>
+                <a:latin typeface="Calibri"/>
               </a:rPr>
               <a:t>The Pastoral Guide</a:t>
             </a:r>
@@ -14610,7 +14335,7 @@
                 <a:solidFill>
                   <a:srgbClr val="8C877D"/>
                 </a:solidFill>
-                <a:latin typeface="Karla"/>
+                <a:latin typeface="Calibri"/>
               </a:rPr>
               <a:t>3 / 19</a:t>
             </a:r>
@@ -14715,64 +14440,9 @@
                 <a:solidFill>
                   <a:srgbClr val="34322F"/>
                 </a:solidFill>
-                <a:latin typeface="Karla"/>
+                <a:latin typeface="Calibri"/>
               </a:rPr>
               <a:t>QUESTION THE HEADLINE  ·  LESSON 4 OF 5</a:t>
-            </a:r>
-          </a:p>
-        </p:txBody>
-      </p:sp>
-      <p:sp>
-        <p:nvSpPr>
-          <p:cNvPr id="4" name="Rounded Rectangle 3"/>
-          <p:cNvSpPr/>
-          <p:nvPr/>
-        </p:nvSpPr>
-        <p:spPr>
-          <a:xfrm>
-            <a:off x="7398742" y="246888"/>
-            <a:ext cx="1059457" cy="237744"/>
-          </a:xfrm>
-          <a:prstGeom prst="roundRect">
-            <a:avLst>
-              <a:gd name="adj" fmla="val 50000"/>
-            </a:avLst>
-          </a:prstGeom>
-          <a:solidFill>
-            <a:srgbClr val="34322F"/>
-          </a:solidFill>
-          <a:ln>
-            <a:noFill/>
-          </a:ln>
-          <a:effectLst/>
-        </p:spPr>
-        <p:style>
-          <a:lnRef idx="1">
-            <a:schemeClr val="accent1"/>
-          </a:lnRef>
-          <a:fillRef idx="3">
-            <a:schemeClr val="accent1"/>
-          </a:fillRef>
-          <a:effectRef idx="0">
-            <a:schemeClr val="accent1"/>
-          </a:effectRef>
-          <a:fontRef idx="minor">
-            <a:schemeClr val="lt1"/>
-          </a:fontRef>
-        </p:style>
-        <p:txBody>
-          <a:bodyPr rtlCol="0" anchor="ctr" wrap="none" lIns="0" rIns="0" tIns="0" bIns="0"/>
-          <a:lstStyle/>
-          <a:p>
-            <a:pPr algn="ctr"/>
-            <a:r>
-              <a:rPr sz="950" b="1" spc="90">
-                <a:solidFill>
-                  <a:srgbClr val="FFFDF7"/>
-                </a:solidFill>
-                <a:latin typeface="Karla"/>
-              </a:rPr>
-              <a:t>STAND UP</a:t>
             </a:r>
           </a:p>
         </p:txBody>
@@ -14809,11 +14479,11 @@
               </a:spcAft>
             </a:pPr>
             <a:r>
-              <a:rPr sz="2800" b="1" i="0">
+              <a:rPr sz="2800" b="0" i="0">
                 <a:solidFill>
                   <a:srgbClr val="262422"/>
                 </a:solidFill>
-                <a:latin typeface="Libre Caslon Display"/>
+                <a:latin typeface="Georgia"/>
               </a:rPr>
               <a:t>How much do you believe it?</a:t>
             </a:r>
@@ -14946,11 +14616,11 @@
               </a:spcAft>
             </a:pPr>
             <a:r>
-              <a:rPr sz="1800" b="1" i="0">
+              <a:rPr sz="1800" b="0" i="0">
                 <a:solidFill>
                   <a:srgbClr val="262422"/>
                 </a:solidFill>
-                <a:latin typeface="Libre Caslon Display"/>
+                <a:latin typeface="Georgia"/>
               </a:rPr>
               <a:t>“If nobody has proved something is harmful, it must be safe.”</a:t>
             </a:r>
@@ -15081,7 +14751,7 @@
                 <a:solidFill>
                   <a:srgbClr val="262422"/>
                 </a:solidFill>
-                <a:latin typeface="Karla"/>
+                <a:latin typeface="Calibri"/>
               </a:rPr>
               <a:t>0</a:t>
             </a:r>
@@ -15168,7 +14838,7 @@
                 <a:solidFill>
                   <a:srgbClr val="56524B"/>
                 </a:solidFill>
-                <a:latin typeface="Karla"/>
+                <a:latin typeface="Calibri"/>
               </a:rPr>
               <a:t>1</a:t>
             </a:r>
@@ -15255,7 +14925,7 @@
                 <a:solidFill>
                   <a:srgbClr val="56524B"/>
                 </a:solidFill>
-                <a:latin typeface="Karla"/>
+                <a:latin typeface="Calibri"/>
               </a:rPr>
               <a:t>2</a:t>
             </a:r>
@@ -15342,7 +15012,7 @@
                 <a:solidFill>
                   <a:srgbClr val="56524B"/>
                 </a:solidFill>
-                <a:latin typeface="Karla"/>
+                <a:latin typeface="Calibri"/>
               </a:rPr>
               <a:t>3</a:t>
             </a:r>
@@ -15429,7 +15099,7 @@
                 <a:solidFill>
                   <a:srgbClr val="56524B"/>
                 </a:solidFill>
-                <a:latin typeface="Karla"/>
+                <a:latin typeface="Calibri"/>
               </a:rPr>
               <a:t>4</a:t>
             </a:r>
@@ -15516,7 +15186,7 @@
                 <a:solidFill>
                   <a:srgbClr val="262422"/>
                 </a:solidFill>
-                <a:latin typeface="Karla"/>
+                <a:latin typeface="Calibri"/>
               </a:rPr>
               <a:t>5</a:t>
             </a:r>
@@ -15603,7 +15273,7 @@
                 <a:solidFill>
                   <a:srgbClr val="56524B"/>
                 </a:solidFill>
-                <a:latin typeface="Karla"/>
+                <a:latin typeface="Calibri"/>
               </a:rPr>
               <a:t>6</a:t>
             </a:r>
@@ -15690,7 +15360,7 @@
                 <a:solidFill>
                   <a:srgbClr val="56524B"/>
                 </a:solidFill>
-                <a:latin typeface="Karla"/>
+                <a:latin typeface="Calibri"/>
               </a:rPr>
               <a:t>7</a:t>
             </a:r>
@@ -15777,7 +15447,7 @@
                 <a:solidFill>
                   <a:srgbClr val="56524B"/>
                 </a:solidFill>
-                <a:latin typeface="Karla"/>
+                <a:latin typeface="Calibri"/>
               </a:rPr>
               <a:t>8</a:t>
             </a:r>
@@ -15864,7 +15534,7 @@
                 <a:solidFill>
                   <a:srgbClr val="56524B"/>
                 </a:solidFill>
-                <a:latin typeface="Karla"/>
+                <a:latin typeface="Calibri"/>
               </a:rPr>
               <a:t>9</a:t>
             </a:r>
@@ -15951,7 +15621,7 @@
                 <a:solidFill>
                   <a:srgbClr val="262422"/>
                 </a:solidFill>
-                <a:latin typeface="Karla"/>
+                <a:latin typeface="Calibri"/>
               </a:rPr>
               <a:t>10</a:t>
             </a:r>
@@ -15994,7 +15664,7 @@
                 <a:solidFill>
                   <a:srgbClr val="34322F"/>
                 </a:solidFill>
-                <a:latin typeface="Karla"/>
+                <a:latin typeface="Calibri"/>
               </a:rPr>
               <a:t>Definitely false</a:t>
             </a:r>
@@ -16037,7 +15707,7 @@
                 <a:solidFill>
                   <a:srgbClr val="34322F"/>
                 </a:solidFill>
-                <a:latin typeface="Karla"/>
+                <a:latin typeface="Calibri"/>
               </a:rPr>
               <a:t>Definitely true</a:t>
             </a:r>
@@ -16080,7 +15750,7 @@
                 <a:solidFill>
                   <a:srgbClr val="34322F"/>
                 </a:solidFill>
-                <a:latin typeface="Karla"/>
+                <a:latin typeface="Calibri"/>
               </a:rPr>
               <a:t>Stand on the line where you are now. Two or three people say why they are standing there.</a:t>
             </a:r>
@@ -16148,7 +15818,7 @@
                 <a:solidFill>
                   <a:srgbClr val="8C877D"/>
                 </a:solidFill>
-                <a:latin typeface="Karla"/>
+                <a:latin typeface="Calibri"/>
               </a:rPr>
               <a:t>The Pastoral Guide</a:t>
             </a:r>
@@ -16191,7 +15861,7 @@
                 <a:solidFill>
                   <a:srgbClr val="8C877D"/>
                 </a:solidFill>
-                <a:latin typeface="Karla"/>
+                <a:latin typeface="Calibri"/>
               </a:rPr>
               <a:t>4 / 19</a:t>
             </a:r>
@@ -16296,64 +15966,9 @@
                 <a:solidFill>
                   <a:srgbClr val="34322F"/>
                 </a:solidFill>
-                <a:latin typeface="Karla"/>
+                <a:latin typeface="Calibri"/>
               </a:rPr>
               <a:t>QUESTION THE HEADLINE  ·  LESSON 4 OF 5</a:t>
-            </a:r>
-          </a:p>
-        </p:txBody>
-      </p:sp>
-      <p:sp>
-        <p:nvSpPr>
-          <p:cNvPr id="4" name="Rounded Rectangle 3"/>
-          <p:cNvSpPr/>
-          <p:nvPr/>
-        </p:nvSpPr>
-        <p:spPr>
-          <a:xfrm>
-            <a:off x="7658580" y="246888"/>
-            <a:ext cx="799619" cy="237744"/>
-          </a:xfrm>
-          <a:prstGeom prst="roundRect">
-            <a:avLst>
-              <a:gd name="adj" fmla="val 50000"/>
-            </a:avLst>
-          </a:prstGeom>
-          <a:solidFill>
-            <a:srgbClr val="34322F"/>
-          </a:solidFill>
-          <a:ln>
-            <a:noFill/>
-          </a:ln>
-          <a:effectLst/>
-        </p:spPr>
-        <p:style>
-          <a:lnRef idx="1">
-            <a:schemeClr val="accent1"/>
-          </a:lnRef>
-          <a:fillRef idx="3">
-            <a:schemeClr val="accent1"/>
-          </a:fillRef>
-          <a:effectRef idx="0">
-            <a:schemeClr val="accent1"/>
-          </a:effectRef>
-          <a:fontRef idx="minor">
-            <a:schemeClr val="lt1"/>
-          </a:fontRef>
-        </p:style>
-        <p:txBody>
-          <a:bodyPr rtlCol="0" anchor="ctr" wrap="none" lIns="0" rIns="0" tIns="0" bIns="0"/>
-          <a:lstStyle/>
-          <a:p>
-            <a:pPr algn="ctr"/>
-            <a:r>
-              <a:rPr sz="950" b="1" spc="90">
-                <a:solidFill>
-                  <a:srgbClr val="FFFDF7"/>
-                </a:solidFill>
-                <a:latin typeface="Karla"/>
-              </a:rPr>
-              <a:t>TEACH</a:t>
             </a:r>
           </a:p>
         </p:txBody>
@@ -16390,11 +16005,11 @@
               </a:spcAft>
             </a:pPr>
             <a:r>
-              <a:rPr sz="2800" b="1" i="0">
+              <a:rPr sz="2800" b="0" i="0">
                 <a:solidFill>
                   <a:srgbClr val="262422"/>
                 </a:solidFill>
-                <a:latin typeface="Libre Caslon Display"/>
+                <a:latin typeface="Georgia"/>
               </a:rPr>
               <a:t>Five questions for any headline</a:t>
             </a:r>
@@ -16546,11 +16161,11 @@
               </a:spcAft>
             </a:pPr>
             <a:r>
-              <a:rPr sz="1300" b="1" i="0">
+              <a:rPr sz="1300" b="0" i="0">
                 <a:solidFill>
                   <a:srgbClr val="262422"/>
                 </a:solidFill>
-                <a:latin typeface="Libre Caslon Display"/>
+                <a:latin typeface="Georgia"/>
               </a:rPr>
               <a:t>Who is saying it?</a:t>
             </a:r>
@@ -16593,7 +16208,7 @@
                 <a:solidFill>
                   <a:srgbClr val="56524B"/>
                 </a:solidFill>
-                <a:latin typeface="Karla"/>
+                <a:latin typeface="Calibri"/>
               </a:rPr>
               <a:t>A company, a scientist, a newspaper, a government? Check the name.</a:t>
             </a:r>
@@ -16745,11 +16360,11 @@
               </a:spcAft>
             </a:pPr>
             <a:r>
-              <a:rPr sz="1300" b="1" i="0">
+              <a:rPr sz="1300" b="0" i="0">
                 <a:solidFill>
                   <a:srgbClr val="262422"/>
                 </a:solidFill>
-                <a:latin typeface="Libre Caslon Display"/>
+                <a:latin typeface="Georgia"/>
               </a:rPr>
               <a:t>Who gains if I believe it?</a:t>
             </a:r>
@@ -16792,7 +16407,7 @@
                 <a:solidFill>
                   <a:srgbClr val="56524B"/>
                 </a:solidFill>
-                <a:latin typeface="Karla"/>
+                <a:latin typeface="Calibri"/>
               </a:rPr>
               <a:t>Somebody always does. Work out who, and what they get.</a:t>
             </a:r>
@@ -16944,11 +16559,11 @@
               </a:spcAft>
             </a:pPr>
             <a:r>
-              <a:rPr sz="1300" b="1" i="0">
+              <a:rPr sz="1300" b="0" i="0">
                 <a:solidFill>
                   <a:srgbClr val="262422"/>
                 </a:solidFill>
-                <a:latin typeface="Libre Caslon Display"/>
+                <a:latin typeface="Georgia"/>
               </a:rPr>
               <a:t>Who paid for it?</a:t>
             </a:r>
@@ -16991,7 +16606,7 @@
                 <a:solidFill>
                   <a:srgbClr val="56524B"/>
                 </a:solidFill>
-                <a:latin typeface="Karla"/>
+                <a:latin typeface="Calibri"/>
               </a:rPr>
               <a:t>The research, the advert, the survey. Money does not make it false, but you should know.</a:t>
             </a:r>
@@ -17143,11 +16758,11 @@
               </a:spcAft>
             </a:pPr>
             <a:r>
-              <a:rPr sz="1300" b="1" i="0">
+              <a:rPr sz="1300" b="0" i="0">
                 <a:solidFill>
                   <a:srgbClr val="262422"/>
                 </a:solidFill>
-                <a:latin typeface="Libre Caslon Display"/>
+                <a:latin typeface="Georgia"/>
               </a:rPr>
               <a:t>What is the evidence?</a:t>
             </a:r>
@@ -17190,7 +16805,7 @@
                 <a:solidFill>
                   <a:srgbClr val="56524B"/>
                 </a:solidFill>
-                <a:latin typeface="Karla"/>
+                <a:latin typeface="Calibri"/>
               </a:rPr>
               <a:t>A study, a number, a graph? Or only a slogan and a famous face?</a:t>
             </a:r>
@@ -17342,11 +16957,11 @@
               </a:spcAft>
             </a:pPr>
             <a:r>
-              <a:rPr sz="1300" b="1" i="0">
+              <a:rPr sz="1300" b="0" i="0">
                 <a:solidFill>
                   <a:srgbClr val="262422"/>
                 </a:solidFill>
-                <a:latin typeface="Libre Caslon Display"/>
+                <a:latin typeface="Georgia"/>
               </a:rPr>
               <a:t>Has it been tested, and by whom?</a:t>
             </a:r>
@@ -17389,7 +17004,7 @@
                 <a:solidFill>
                   <a:srgbClr val="56524B"/>
                 </a:solidFill>
-                <a:latin typeface="Karla"/>
+                <a:latin typeface="Calibri"/>
               </a:rPr>
               <a:t>Tested on whom, for how long, and by somebody with nothing to gain?</a:t>
             </a:r>
@@ -17432,7 +17047,7 @@
                 <a:solidFill>
                   <a:srgbClr val="34322F"/>
                 </a:solidFill>
-                <a:latin typeface="Karla"/>
+                <a:latin typeface="Calibri"/>
               </a:rPr>
               <a:t>These five come back in every lesson. The first one is on the front page already.</a:t>
             </a:r>
@@ -17500,7 +17115,7 @@
                 <a:solidFill>
                   <a:srgbClr val="8C877D"/>
                 </a:solidFill>
-                <a:latin typeface="Karla"/>
+                <a:latin typeface="Calibri"/>
               </a:rPr>
               <a:t>The Pastoral Guide</a:t>
             </a:r>
@@ -17543,7 +17158,7 @@
                 <a:solidFill>
                   <a:srgbClr val="8C877D"/>
                 </a:solidFill>
-                <a:latin typeface="Karla"/>
+                <a:latin typeface="Calibri"/>
               </a:rPr>
               <a:t>5 / 19</a:t>
             </a:r>
@@ -17648,7 +17263,7 @@
                 <a:solidFill>
                   <a:srgbClr val="34322F"/>
                 </a:solidFill>
-                <a:latin typeface="Karla"/>
+                <a:latin typeface="Calibri"/>
               </a:rPr>
               <a:t>QUESTION THE HEADLINE  ·  LESSON 4 OF 5</a:t>
             </a:r>
@@ -17657,19 +17272,147 @@
       </p:sp>
       <p:sp>
         <p:nvSpPr>
-          <p:cNvPr id="4" name="Rounded Rectangle 3"/>
+          <p:cNvPr id="5" name="TextBox 4"/>
+          <p:cNvSpPr txBox="1"/>
+          <p:nvPr/>
+        </p:nvSpPr>
+        <p:spPr>
+          <a:xfrm>
+            <a:off x="685800" y="566928"/>
+            <a:ext cx="7772400" cy="434848"/>
+          </a:xfrm>
+          <a:prstGeom prst="rect">
+            <a:avLst/>
+          </a:prstGeom>
+          <a:noFill/>
+          <a:effectLst/>
+        </p:spPr>
+        <p:txBody>
+          <a:bodyPr wrap="square" anchor="t" lIns="0" rIns="0" tIns="0" bIns="0">
+            <a:spAutoFit/>
+          </a:bodyPr>
+          <a:lstStyle/>
+          <a:p>
+            <a:pPr algn="l">
+              <a:lnSpc>
+                <a:spcPct val="105000"/>
+              </a:lnSpc>
+              <a:spcAft>
+                <a:spcPts val="0"/>
+              </a:spcAft>
+            </a:pPr>
+            <a:r>
+              <a:rPr sz="2800" b="0" i="0">
+                <a:solidFill>
+                  <a:srgbClr val="262422"/>
+                </a:solidFill>
+                <a:latin typeface="Georgia"/>
+              </a:rPr>
+              <a:t>Watch the first one</a:t>
+            </a:r>
+          </a:p>
+        </p:txBody>
+      </p:sp>
+      <p:sp>
+        <p:nvSpPr>
+          <p:cNvPr id="6" name="TextBox 5"/>
+          <p:cNvSpPr txBox="1"/>
+          <p:nvPr/>
+        </p:nvSpPr>
+        <p:spPr>
+          <a:xfrm>
+            <a:off x="685800" y="1170432"/>
+            <a:ext cx="7772400" cy="274320"/>
+          </a:xfrm>
+          <a:prstGeom prst="rect">
+            <a:avLst/>
+          </a:prstGeom>
+          <a:noFill/>
+          <a:effectLst/>
+        </p:spPr>
+        <p:txBody>
+          <a:bodyPr wrap="square" anchor="t" lIns="0" rIns="0" tIns="0" bIns="0">
+            <a:spAutoFit/>
+          </a:bodyPr>
+          <a:lstStyle/>
+          <a:p>
+            <a:pPr algn="l">
+              <a:lnSpc>
+                <a:spcPct val="125000"/>
+              </a:lnSpc>
+              <a:spcAft>
+                <a:spcPts val="0"/>
+              </a:spcAft>
+            </a:pPr>
+            <a:r>
+              <a:rPr sz="1600" b="0" i="0">
+                <a:solidFill>
+                  <a:srgbClr val="34322F"/>
+                </a:solidFill>
+                <a:latin typeface="Georgia"/>
+              </a:rPr>
+              <a:t>Question 1:  Who is saying it?</a:t>
+            </a:r>
+          </a:p>
+        </p:txBody>
+      </p:sp>
+      <p:sp>
+        <p:nvSpPr>
+          <p:cNvPr id="7" name="Rectangle 6"/>
           <p:cNvSpPr/>
           <p:nvPr/>
         </p:nvSpPr>
         <p:spPr>
           <a:xfrm>
-            <a:off x="7624101" y="246888"/>
-            <a:ext cx="834098" cy="237744"/>
-          </a:xfrm>
-          <a:prstGeom prst="roundRect">
-            <a:avLst>
-              <a:gd name="adj" fmla="val 50000"/>
-            </a:avLst>
+            <a:off x="685800" y="1609344"/>
+            <a:ext cx="7772400" cy="1249680"/>
+          </a:xfrm>
+          <a:prstGeom prst="rect">
+            <a:avLst/>
+          </a:prstGeom>
+          <a:solidFill>
+            <a:srgbClr val="FFFFFF"/>
+          </a:solidFill>
+          <a:ln>
+            <a:noFill/>
+          </a:ln>
+          <a:effectLst/>
+        </p:spPr>
+        <p:style>
+          <a:lnRef idx="1">
+            <a:schemeClr val="accent1"/>
+          </a:lnRef>
+          <a:fillRef idx="3">
+            <a:schemeClr val="accent1"/>
+          </a:fillRef>
+          <a:effectRef idx="0">
+            <a:schemeClr val="accent1"/>
+          </a:effectRef>
+          <a:fontRef idx="minor">
+            <a:schemeClr val="lt1"/>
+          </a:fontRef>
+        </p:style>
+        <p:txBody>
+          <a:bodyPr rtlCol="0" anchor="ctr"/>
+          <a:lstStyle/>
+          <a:p>
+            <a:pPr algn="ctr"/>
+          </a:p>
+        </p:txBody>
+      </p:sp>
+      <p:sp>
+        <p:nvSpPr>
+          <p:cNvPr id="8" name="Rectangle 7"/>
+          <p:cNvSpPr/>
+          <p:nvPr/>
+        </p:nvSpPr>
+        <p:spPr>
+          <a:xfrm>
+            <a:off x="685800" y="1609344"/>
+            <a:ext cx="45720" cy="1249680"/>
+          </a:xfrm>
+          <a:prstGeom prst="rect">
+            <a:avLst/>
           </a:prstGeom>
           <a:solidFill>
             <a:srgbClr val="34322F"/>
@@ -17694,189 +17437,6 @@
           </a:fontRef>
         </p:style>
         <p:txBody>
-          <a:bodyPr rtlCol="0" anchor="ctr" wrap="none" lIns="0" rIns="0" tIns="0" bIns="0"/>
-          <a:lstStyle/>
-          <a:p>
-            <a:pPr algn="ctr"/>
-            <a:r>
-              <a:rPr sz="950" b="1" spc="90">
-                <a:solidFill>
-                  <a:srgbClr val="FFFDF7"/>
-                </a:solidFill>
-                <a:latin typeface="Karla"/>
-              </a:rPr>
-              <a:t>MODEL</a:t>
-            </a:r>
-          </a:p>
-        </p:txBody>
-      </p:sp>
-      <p:sp>
-        <p:nvSpPr>
-          <p:cNvPr id="5" name="TextBox 4"/>
-          <p:cNvSpPr txBox="1"/>
-          <p:nvPr/>
-        </p:nvSpPr>
-        <p:spPr>
-          <a:xfrm>
-            <a:off x="685800" y="566928"/>
-            <a:ext cx="7772400" cy="434848"/>
-          </a:xfrm>
-          <a:prstGeom prst="rect">
-            <a:avLst/>
-          </a:prstGeom>
-          <a:noFill/>
-          <a:effectLst/>
-        </p:spPr>
-        <p:txBody>
-          <a:bodyPr wrap="square" anchor="t" lIns="0" rIns="0" tIns="0" bIns="0">
-            <a:spAutoFit/>
-          </a:bodyPr>
-          <a:lstStyle/>
-          <a:p>
-            <a:pPr algn="l">
-              <a:lnSpc>
-                <a:spcPct val="105000"/>
-              </a:lnSpc>
-              <a:spcAft>
-                <a:spcPts val="0"/>
-              </a:spcAft>
-            </a:pPr>
-            <a:r>
-              <a:rPr sz="2800" b="1" i="0">
-                <a:solidFill>
-                  <a:srgbClr val="262422"/>
-                </a:solidFill>
-                <a:latin typeface="Libre Caslon Display"/>
-              </a:rPr>
-              <a:t>Watch the first one</a:t>
-            </a:r>
-          </a:p>
-        </p:txBody>
-      </p:sp>
-      <p:sp>
-        <p:nvSpPr>
-          <p:cNvPr id="6" name="TextBox 5"/>
-          <p:cNvSpPr txBox="1"/>
-          <p:nvPr/>
-        </p:nvSpPr>
-        <p:spPr>
-          <a:xfrm>
-            <a:off x="685800" y="1170432"/>
-            <a:ext cx="7772400" cy="274320"/>
-          </a:xfrm>
-          <a:prstGeom prst="rect">
-            <a:avLst/>
-          </a:prstGeom>
-          <a:noFill/>
-          <a:effectLst/>
-        </p:spPr>
-        <p:txBody>
-          <a:bodyPr wrap="square" anchor="t" lIns="0" rIns="0" tIns="0" bIns="0">
-            <a:spAutoFit/>
-          </a:bodyPr>
-          <a:lstStyle/>
-          <a:p>
-            <a:pPr algn="l">
-              <a:lnSpc>
-                <a:spcPct val="125000"/>
-              </a:lnSpc>
-              <a:spcAft>
-                <a:spcPts val="0"/>
-              </a:spcAft>
-            </a:pPr>
-            <a:r>
-              <a:rPr sz="1600" b="1" i="0">
-                <a:solidFill>
-                  <a:srgbClr val="34322F"/>
-                </a:solidFill>
-                <a:latin typeface="Libre Caslon Display"/>
-              </a:rPr>
-              <a:t>Question 1:  Who is saying it?</a:t>
-            </a:r>
-          </a:p>
-        </p:txBody>
-      </p:sp>
-      <p:sp>
-        <p:nvSpPr>
-          <p:cNvPr id="7" name="Rectangle 6"/>
-          <p:cNvSpPr/>
-          <p:nvPr/>
-        </p:nvSpPr>
-        <p:spPr>
-          <a:xfrm>
-            <a:off x="685800" y="1609344"/>
-            <a:ext cx="7772400" cy="1249680"/>
-          </a:xfrm>
-          <a:prstGeom prst="rect">
-            <a:avLst/>
-          </a:prstGeom>
-          <a:solidFill>
-            <a:srgbClr val="FFFFFF"/>
-          </a:solidFill>
-          <a:ln>
-            <a:noFill/>
-          </a:ln>
-          <a:effectLst/>
-        </p:spPr>
-        <p:style>
-          <a:lnRef idx="1">
-            <a:schemeClr val="accent1"/>
-          </a:lnRef>
-          <a:fillRef idx="3">
-            <a:schemeClr val="accent1"/>
-          </a:fillRef>
-          <a:effectRef idx="0">
-            <a:schemeClr val="accent1"/>
-          </a:effectRef>
-          <a:fontRef idx="minor">
-            <a:schemeClr val="lt1"/>
-          </a:fontRef>
-        </p:style>
-        <p:txBody>
-          <a:bodyPr rtlCol="0" anchor="ctr"/>
-          <a:lstStyle/>
-          <a:p>
-            <a:pPr algn="ctr"/>
-          </a:p>
-        </p:txBody>
-      </p:sp>
-      <p:sp>
-        <p:nvSpPr>
-          <p:cNvPr id="8" name="Rectangle 7"/>
-          <p:cNvSpPr/>
-          <p:nvPr/>
-        </p:nvSpPr>
-        <p:spPr>
-          <a:xfrm>
-            <a:off x="685800" y="1609344"/>
-            <a:ext cx="45720" cy="1249680"/>
-          </a:xfrm>
-          <a:prstGeom prst="rect">
-            <a:avLst/>
-          </a:prstGeom>
-          <a:solidFill>
-            <a:srgbClr val="34322F"/>
-          </a:solidFill>
-          <a:ln>
-            <a:noFill/>
-          </a:ln>
-          <a:effectLst/>
-        </p:spPr>
-        <p:style>
-          <a:lnRef idx="1">
-            <a:schemeClr val="accent1"/>
-          </a:lnRef>
-          <a:fillRef idx="3">
-            <a:schemeClr val="accent1"/>
-          </a:fillRef>
-          <a:effectRef idx="0">
-            <a:schemeClr val="accent1"/>
-          </a:effectRef>
-          <a:fontRef idx="minor">
-            <a:schemeClr val="lt1"/>
-          </a:fontRef>
-        </p:style>
-        <p:txBody>
           <a:bodyPr rtlCol="0" anchor="ctr"/>
           <a:lstStyle/>
           <a:p>
@@ -17920,7 +17480,7 @@
                 <a:solidFill>
                   <a:srgbClr val="262422"/>
                 </a:solidFill>
-                <a:latin typeface="Karla"/>
+                <a:latin typeface="Calibri"/>
               </a:rPr>
               <a:t>A committee called in by the government. It says it found no real evidence of harm. It does not say how hard it looked, or who did the testing.</a:t>
             </a:r>
@@ -17963,7 +17523,7 @@
                 <a:solidFill>
                   <a:srgbClr val="56524B"/>
                 </a:solidFill>
-                <a:latin typeface="Karla"/>
+                <a:latin typeface="Calibri"/>
               </a:rPr>
               <a:t>Notice the answer is not true or false. It tells you what to look for next.</a:t>
             </a:r>
@@ -18031,7 +17591,7 @@
                 <a:solidFill>
                   <a:srgbClr val="8C877D"/>
                 </a:solidFill>
-                <a:latin typeface="Karla"/>
+                <a:latin typeface="Calibri"/>
               </a:rPr>
               <a:t>The Pastoral Guide</a:t>
             </a:r>
@@ -18074,7 +17634,7 @@
                 <a:solidFill>
                   <a:srgbClr val="8C877D"/>
                 </a:solidFill>
-                <a:latin typeface="Karla"/>
+                <a:latin typeface="Calibri"/>
               </a:rPr>
               <a:t>6 / 19</a:t>
             </a:r>
@@ -18179,64 +17739,9 @@
                 <a:solidFill>
                   <a:srgbClr val="34322F"/>
                 </a:solidFill>
-                <a:latin typeface="Karla"/>
+                <a:latin typeface="Calibri"/>
               </a:rPr>
               <a:t>QUESTION THE HEADLINE  ·  LESSON 4 OF 5</a:t>
-            </a:r>
-          </a:p>
-        </p:txBody>
-      </p:sp>
-      <p:sp>
-        <p:nvSpPr>
-          <p:cNvPr id="4" name="Rounded Rectangle 3"/>
-          <p:cNvSpPr/>
-          <p:nvPr/>
-        </p:nvSpPr>
-        <p:spPr>
-          <a:xfrm>
-            <a:off x="7356624" y="246888"/>
-            <a:ext cx="1101575" cy="237744"/>
-          </a:xfrm>
-          <a:prstGeom prst="roundRect">
-            <a:avLst>
-              <a:gd name="adj" fmla="val 50000"/>
-            </a:avLst>
-          </a:prstGeom>
-          <a:solidFill>
-            <a:srgbClr val="34322F"/>
-          </a:solidFill>
-          <a:ln>
-            <a:noFill/>
-          </a:ln>
-          <a:effectLst/>
-        </p:spPr>
-        <p:style>
-          <a:lnRef idx="1">
-            <a:schemeClr val="accent1"/>
-          </a:lnRef>
-          <a:fillRef idx="3">
-            <a:schemeClr val="accent1"/>
-          </a:fillRef>
-          <a:effectRef idx="0">
-            <a:schemeClr val="accent1"/>
-          </a:effectRef>
-          <a:fontRef idx="minor">
-            <a:schemeClr val="lt1"/>
-          </a:fontRef>
-        </p:style>
-        <p:txBody>
-          <a:bodyPr rtlCol="0" anchor="ctr" wrap="none" lIns="0" rIns="0" tIns="0" bIns="0"/>
-          <a:lstStyle/>
-          <a:p>
-            <a:pPr algn="ctr"/>
-            <a:r>
-              <a:rPr sz="950" b="1" spc="90">
-                <a:solidFill>
-                  <a:srgbClr val="FFFDF7"/>
-                </a:solidFill>
-                <a:latin typeface="Karla"/>
-              </a:rPr>
-              <a:t>TOGETHER</a:t>
             </a:r>
           </a:p>
         </p:txBody>
@@ -18273,11 +17778,11 @@
               </a:spcAft>
             </a:pPr>
             <a:r>
-              <a:rPr sz="2800" b="1" i="0">
+              <a:rPr sz="2800" b="0" i="0">
                 <a:solidFill>
                   <a:srgbClr val="262422"/>
                 </a:solidFill>
-                <a:latin typeface="Libre Caslon Display"/>
+                <a:latin typeface="Georgia"/>
               </a:rPr>
               <a:t>Now the other four</a:t>
             </a:r>
@@ -18320,7 +17825,7 @@
                 <a:solidFill>
                   <a:srgbClr val="56524B"/>
                 </a:solidFill>
-                <a:latin typeface="Karla"/>
+                <a:latin typeface="Calibri"/>
               </a:rPr>
               <a:t>Can the front page answer them? Talk it through in your group.</a:t>
             </a:r>
@@ -18516,11 +18021,11 @@
               </a:spcAft>
             </a:pPr>
             <a:r>
-              <a:rPr sz="1300" b="1" i="0">
+              <a:rPr sz="1300" b="0" i="0">
                 <a:solidFill>
                   <a:srgbClr val="262422"/>
                 </a:solidFill>
-                <a:latin typeface="Libre Caslon Display"/>
+                <a:latin typeface="Georgia"/>
               </a:rPr>
               <a:t>Who gains if I believe it?</a:t>
             </a:r>
@@ -18716,11 +18221,11 @@
               </a:spcAft>
             </a:pPr>
             <a:r>
-              <a:rPr sz="1300" b="1" i="0">
+              <a:rPr sz="1300" b="0" i="0">
                 <a:solidFill>
                   <a:srgbClr val="262422"/>
                 </a:solidFill>
-                <a:latin typeface="Libre Caslon Display"/>
+                <a:latin typeface="Georgia"/>
               </a:rPr>
               <a:t>Who paid for it?</a:t>
             </a:r>
@@ -18916,11 +18421,11 @@
               </a:spcAft>
             </a:pPr>
             <a:r>
-              <a:rPr sz="1300" b="1" i="0">
+              <a:rPr sz="1300" b="0" i="0">
                 <a:solidFill>
                   <a:srgbClr val="262422"/>
                 </a:solidFill>
-                <a:latin typeface="Libre Caslon Display"/>
+                <a:latin typeface="Georgia"/>
               </a:rPr>
               <a:t>What is the evidence?</a:t>
             </a:r>
@@ -19116,11 +18621,11 @@
               </a:spcAft>
             </a:pPr>
             <a:r>
-              <a:rPr sz="1300" b="1" i="0">
+              <a:rPr sz="1300" b="0" i="0">
                 <a:solidFill>
                   <a:srgbClr val="262422"/>
                 </a:solidFill>
-                <a:latin typeface="Libre Caslon Display"/>
+                <a:latin typeface="Georgia"/>
               </a:rPr>
               <a:t>Has it been tested, and by whom?</a:t>
             </a:r>
@@ -19163,7 +18668,7 @@
                 <a:solidFill>
                   <a:srgbClr val="34322F"/>
                 </a:solidFill>
-                <a:latin typeface="Karla"/>
+                <a:latin typeface="Calibri"/>
               </a:rPr>
               <a:t>Then fill in the top of your evidence sheet: where you stand, and what you would need to know.</a:t>
             </a:r>
@@ -19231,7 +18736,7 @@
                 <a:solidFill>
                   <a:srgbClr val="8C877D"/>
                 </a:solidFill>
-                <a:latin typeface="Karla"/>
+                <a:latin typeface="Calibri"/>
               </a:rPr>
               <a:t>The Pastoral Guide</a:t>
             </a:r>
@@ -19274,7 +18779,7 @@
                 <a:solidFill>
                   <a:srgbClr val="8C877D"/>
                 </a:solidFill>
-                <a:latin typeface="Karla"/>
+                <a:latin typeface="Calibri"/>
               </a:rPr>
               <a:t>7 / 19</a:t>
             </a:r>
@@ -19379,7 +18884,7 @@
                 <a:solidFill>
                   <a:srgbClr val="34322F"/>
                 </a:solidFill>
-                <a:latin typeface="Karla"/>
+                <a:latin typeface="Calibri"/>
               </a:rPr>
               <a:t>QUESTION THE HEADLINE  ·  LESSON 4 OF 5</a:t>
             </a:r>
@@ -19434,7 +18939,7 @@
                 <a:solidFill>
                   <a:srgbClr val="FFFDF7"/>
                 </a:solidFill>
-                <a:latin typeface="Karla"/>
+                <a:latin typeface="Calibri"/>
               </a:rPr>
               <a:t>ROUND 1 OF 4</a:t>
             </a:r>
@@ -19521,7 +19026,7 @@
                 <a:solidFill>
                   <a:srgbClr val="FFFDF7"/>
                 </a:solidFill>
-                <a:latin typeface="Karla"/>
+                <a:latin typeface="Calibri"/>
               </a:rPr>
               <a:t>EVIDENCE A</a:t>
             </a:r>
@@ -19648,11 +19153,11 @@
               </a:spcAft>
             </a:pPr>
             <a:r>
-              <a:rPr sz="2200" b="1" i="0">
+              <a:rPr sz="2200" b="0" i="0">
                 <a:solidFill>
                   <a:srgbClr val="262422"/>
                 </a:solidFill>
-                <a:latin typeface="Libre Caslon Display"/>
+                <a:latin typeface="Georgia"/>
               </a:rPr>
               <a:t>The deaths</a:t>
             </a:r>
@@ -19738,7 +19243,7 @@
                 <a:solidFill>
                   <a:srgbClr val="8C877D"/>
                 </a:solidFill>
-                <a:latin typeface="Karla"/>
+                <a:latin typeface="Calibri"/>
               </a:rPr>
               <a:t>Source: Wikipedia, Tetraethyllead</a:t>
             </a:r>
@@ -19781,7 +19286,7 @@
                 <a:solidFill>
                   <a:srgbClr val="34322F"/>
                 </a:solidFill>
-                <a:latin typeface="Karla"/>
+                <a:latin typeface="Calibri"/>
               </a:rPr>
               <a:t>Read it as a group. Fill in the card A row on your evidence sheet, then move on the line.</a:t>
             </a:r>
@@ -19849,7 +19354,7 @@
                 <a:solidFill>
                   <a:srgbClr val="8C877D"/>
                 </a:solidFill>
-                <a:latin typeface="Karla"/>
+                <a:latin typeface="Calibri"/>
               </a:rPr>
               <a:t>The Pastoral Guide</a:t>
             </a:r>
@@ -19892,7 +19397,7 @@
                 <a:solidFill>
                   <a:srgbClr val="8C877D"/>
                 </a:solidFill>
-                <a:latin typeface="Karla"/>
+                <a:latin typeface="Calibri"/>
               </a:rPr>
               <a:t>8 / 19</a:t>
             </a:r>
@@ -19997,7 +19502,7 @@
                 <a:solidFill>
                   <a:srgbClr val="34322F"/>
                 </a:solidFill>
-                <a:latin typeface="Karla"/>
+                <a:latin typeface="Calibri"/>
               </a:rPr>
               <a:t>QUESTION THE HEADLINE  ·  LESSON 4 OF 5</a:t>
             </a:r>
@@ -20052,7 +19557,7 @@
                 <a:solidFill>
                   <a:srgbClr val="FFFDF7"/>
                 </a:solidFill>
-                <a:latin typeface="Karla"/>
+                <a:latin typeface="Calibri"/>
               </a:rPr>
               <a:t>ROUND 2 OF 4</a:t>
             </a:r>
@@ -20139,7 +19644,7 @@
                 <a:solidFill>
                   <a:srgbClr val="FFFDF7"/>
                 </a:solidFill>
-                <a:latin typeface="Karla"/>
+                <a:latin typeface="Calibri"/>
               </a:rPr>
               <a:t>EVIDENCE B</a:t>
             </a:r>
@@ -20266,11 +19771,11 @@
               </a:spcAft>
             </a:pPr>
             <a:r>
-              <a:rPr sz="2200" b="1" i="0">
+              <a:rPr sz="2200" b="0" i="0">
                 <a:solidFill>
                   <a:srgbClr val="262422"/>
                 </a:solidFill>
-                <a:latin typeface="Libre Caslon Display"/>
+                <a:latin typeface="Georgia"/>
               </a:rPr>
               <a:t>The expert</a:t>
             </a:r>
@@ -20356,7 +19861,7 @@
                 <a:solidFill>
                   <a:srgbClr val="8C877D"/>
                 </a:solidFill>
-                <a:latin typeface="Karla"/>
+                <a:latin typeface="Calibri"/>
               </a:rPr>
               <a:t>Source: Wikipedia, Robert A. Kehoe; University of Cincinnati Libraries</a:t>
             </a:r>
@@ -20399,7 +19904,7 @@
                 <a:solidFill>
                   <a:srgbClr val="34322F"/>
                 </a:solidFill>
-                <a:latin typeface="Karla"/>
+                <a:latin typeface="Calibri"/>
               </a:rPr>
               <a:t>Read it as a group. Fill in the card B row on your evidence sheet, then move on the line.</a:t>
             </a:r>
@@ -20467,7 +19972,7 @@
                 <a:solidFill>
                   <a:srgbClr val="8C877D"/>
                 </a:solidFill>
-                <a:latin typeface="Karla"/>
+                <a:latin typeface="Calibri"/>
               </a:rPr>
               <a:t>The Pastoral Guide</a:t>
             </a:r>
@@ -20510,7 +20015,7 @@
                 <a:solidFill>
                   <a:srgbClr val="8C877D"/>
                 </a:solidFill>
-                <a:latin typeface="Karla"/>
+                <a:latin typeface="Calibri"/>
               </a:rPr>
               <a:t>9 / 19</a:t>
             </a:r>
